--- a/game-design/sbs-game-academy/SRPG 이동력 시스템 관련 캐릭터 및 지형 상상기획.pptx
+++ b/game-design/sbs-game-academy/SRPG 이동력 시스템 관련 캐릭터 및 지형 상상기획.pptx
@@ -8,6 +8,7 @@
     <p:sldId id="260" r:id="rId2"/>
     <p:sldId id="259" r:id="rId3"/>
     <p:sldId id="256" r:id="rId4"/>
+    <p:sldId id="261" r:id="rId5"/>
   </p:sldIdLst>
   <p:sldSz cx="12192000" cy="6858000"/>
   <p:notesSz cx="6858000" cy="9144000"/>
@@ -6313,6 +6314,2477 @@
 </p:sld>
 </file>
 
+<file path=ppt/slides/slide4.xml><?xml version="1.0" encoding="utf-8"?>
+<p:sld xmlns:a="http://schemas.openxmlformats.org/drawingml/2006/main" xmlns:r="http://schemas.openxmlformats.org/officeDocument/2006/relationships" xmlns:p="http://schemas.openxmlformats.org/presentationml/2006/main">
+  <p:cSld>
+    <p:spTree>
+      <p:nvGrpSpPr>
+        <p:cNvPr id="1" name=""/>
+        <p:cNvGrpSpPr/>
+        <p:nvPr/>
+      </p:nvGrpSpPr>
+      <p:grpSpPr>
+        <a:xfrm>
+          <a:off x="0" y="0"/>
+          <a:ext cx="0" cy="0"/>
+          <a:chOff x="0" y="0"/>
+          <a:chExt cx="0" cy="0"/>
+        </a:xfrm>
+      </p:grpSpPr>
+      <p:sp>
+        <p:nvSpPr>
+          <p:cNvPr id="3" name="순서도: 수행의 시작/종료 2">
+            <a:extLst>
+              <a:ext uri="{FF2B5EF4-FFF2-40B4-BE49-F238E27FC236}">
+                <a16:creationId xmlns:a16="http://schemas.microsoft.com/office/drawing/2014/main" id="{24941745-C699-4D38-B7C6-DA4766D668CC}"/>
+              </a:ext>
+            </a:extLst>
+          </p:cNvPr>
+          <p:cNvSpPr/>
+          <p:nvPr/>
+        </p:nvSpPr>
+        <p:spPr>
+          <a:xfrm>
+            <a:off x="2114027" y="318781"/>
+            <a:ext cx="947956" cy="335560"/>
+          </a:xfrm>
+          <a:prstGeom prst="flowChartTerminator">
+            <a:avLst/>
+          </a:prstGeom>
+        </p:spPr>
+        <p:style>
+          <a:lnRef idx="2">
+            <a:schemeClr val="accent1">
+              <a:shade val="50000"/>
+            </a:schemeClr>
+          </a:lnRef>
+          <a:fillRef idx="1">
+            <a:schemeClr val="accent1"/>
+          </a:fillRef>
+          <a:effectRef idx="0">
+            <a:schemeClr val="accent1"/>
+          </a:effectRef>
+          <a:fontRef idx="minor">
+            <a:schemeClr val="lt1"/>
+          </a:fontRef>
+        </p:style>
+        <p:txBody>
+          <a:bodyPr rtlCol="0" anchor="ctr"/>
+          <a:lstStyle/>
+          <a:p>
+            <a:pPr algn="ctr"/>
+            <a:r>
+              <a:rPr lang="ko-KR" altLang="en-US" sz="1000" b="1" dirty="0"/>
+              <a:t>시작</a:t>
+            </a:r>
+          </a:p>
+        </p:txBody>
+      </p:sp>
+      <p:sp>
+        <p:nvSpPr>
+          <p:cNvPr id="4" name="순서도: 처리 3">
+            <a:extLst>
+              <a:ext uri="{FF2B5EF4-FFF2-40B4-BE49-F238E27FC236}">
+                <a16:creationId xmlns:a16="http://schemas.microsoft.com/office/drawing/2014/main" id="{A9482FF8-2B29-4602-ABB8-3A49642B08A7}"/>
+              </a:ext>
+            </a:extLst>
+          </p:cNvPr>
+          <p:cNvSpPr/>
+          <p:nvPr/>
+        </p:nvSpPr>
+        <p:spPr>
+          <a:xfrm>
+            <a:off x="2114027" y="813732"/>
+            <a:ext cx="947956" cy="387073"/>
+          </a:xfrm>
+          <a:prstGeom prst="flowChartProcess">
+            <a:avLst/>
+          </a:prstGeom>
+        </p:spPr>
+        <p:style>
+          <a:lnRef idx="2">
+            <a:schemeClr val="accent1">
+              <a:shade val="50000"/>
+            </a:schemeClr>
+          </a:lnRef>
+          <a:fillRef idx="1">
+            <a:schemeClr val="accent1"/>
+          </a:fillRef>
+          <a:effectRef idx="0">
+            <a:schemeClr val="accent1"/>
+          </a:effectRef>
+          <a:fontRef idx="minor">
+            <a:schemeClr val="lt1"/>
+          </a:fontRef>
+        </p:style>
+        <p:txBody>
+          <a:bodyPr rtlCol="0" anchor="ctr"/>
+          <a:lstStyle/>
+          <a:p>
+            <a:pPr algn="ctr"/>
+            <a:r>
+              <a:rPr lang="ko-KR" altLang="en-US" sz="1000" b="1" dirty="0"/>
+              <a:t>캐릭터선택</a:t>
+            </a:r>
+          </a:p>
+        </p:txBody>
+      </p:sp>
+      <p:sp>
+        <p:nvSpPr>
+          <p:cNvPr id="6" name="순서도: 판단 5">
+            <a:extLst>
+              <a:ext uri="{FF2B5EF4-FFF2-40B4-BE49-F238E27FC236}">
+                <a16:creationId xmlns:a16="http://schemas.microsoft.com/office/drawing/2014/main" id="{81449077-07E8-48E2-A5CE-D95AD1D69FC6}"/>
+              </a:ext>
+            </a:extLst>
+          </p:cNvPr>
+          <p:cNvSpPr/>
+          <p:nvPr/>
+        </p:nvSpPr>
+        <p:spPr>
+          <a:xfrm>
+            <a:off x="1832996" y="1418920"/>
+            <a:ext cx="1510017" cy="696286"/>
+          </a:xfrm>
+          <a:prstGeom prst="flowChartDecision">
+            <a:avLst/>
+          </a:prstGeom>
+        </p:spPr>
+        <p:style>
+          <a:lnRef idx="2">
+            <a:schemeClr val="accent1">
+              <a:shade val="50000"/>
+            </a:schemeClr>
+          </a:lnRef>
+          <a:fillRef idx="1">
+            <a:schemeClr val="accent1"/>
+          </a:fillRef>
+          <a:effectRef idx="0">
+            <a:schemeClr val="accent1"/>
+          </a:effectRef>
+          <a:fontRef idx="minor">
+            <a:schemeClr val="lt1"/>
+          </a:fontRef>
+        </p:style>
+        <p:txBody>
+          <a:bodyPr rtlCol="0" anchor="ctr"/>
+          <a:lstStyle/>
+          <a:p>
+            <a:pPr algn="ctr"/>
+            <a:r>
+              <a:rPr lang="ko-KR" altLang="en-US" sz="1000" b="1" dirty="0"/>
+              <a:t>행동 가능 캐릭터</a:t>
+            </a:r>
+            <a:r>
+              <a:rPr lang="en-US" altLang="ko-KR" sz="1000" b="1" dirty="0"/>
+              <a:t>?</a:t>
+            </a:r>
+            <a:endParaRPr lang="ko-KR" altLang="en-US" sz="1000" b="1" dirty="0"/>
+          </a:p>
+        </p:txBody>
+      </p:sp>
+      <p:sp>
+        <p:nvSpPr>
+          <p:cNvPr id="10" name="순서도: 처리 9">
+            <a:extLst>
+              <a:ext uri="{FF2B5EF4-FFF2-40B4-BE49-F238E27FC236}">
+                <a16:creationId xmlns:a16="http://schemas.microsoft.com/office/drawing/2014/main" id="{6D90FCE8-EDB3-4248-BCCF-D31FF4888B24}"/>
+              </a:ext>
+            </a:extLst>
+          </p:cNvPr>
+          <p:cNvSpPr/>
+          <p:nvPr/>
+        </p:nvSpPr>
+        <p:spPr>
+          <a:xfrm>
+            <a:off x="6441526" y="3884807"/>
+            <a:ext cx="1076586" cy="387073"/>
+          </a:xfrm>
+          <a:prstGeom prst="flowChartProcess">
+            <a:avLst/>
+          </a:prstGeom>
+        </p:spPr>
+        <p:style>
+          <a:lnRef idx="2">
+            <a:schemeClr val="accent1">
+              <a:shade val="50000"/>
+            </a:schemeClr>
+          </a:lnRef>
+          <a:fillRef idx="1">
+            <a:schemeClr val="accent1"/>
+          </a:fillRef>
+          <a:effectRef idx="0">
+            <a:schemeClr val="accent1"/>
+          </a:effectRef>
+          <a:fontRef idx="minor">
+            <a:schemeClr val="lt1"/>
+          </a:fontRef>
+        </p:style>
+        <p:txBody>
+          <a:bodyPr rtlCol="0" anchor="ctr"/>
+          <a:lstStyle/>
+          <a:p>
+            <a:pPr algn="ctr"/>
+            <a:r>
+              <a:rPr lang="ko-KR" altLang="en-US" sz="1000" b="1" dirty="0"/>
+              <a:t>보병 규칙 적용</a:t>
+            </a:r>
+          </a:p>
+        </p:txBody>
+      </p:sp>
+      <p:sp>
+        <p:nvSpPr>
+          <p:cNvPr id="11" name="순서도: 처리 10">
+            <a:extLst>
+              <a:ext uri="{FF2B5EF4-FFF2-40B4-BE49-F238E27FC236}">
+                <a16:creationId xmlns:a16="http://schemas.microsoft.com/office/drawing/2014/main" id="{2ECF54BB-6B31-48EC-AB09-F043E505D21C}"/>
+              </a:ext>
+            </a:extLst>
+          </p:cNvPr>
+          <p:cNvSpPr/>
+          <p:nvPr/>
+        </p:nvSpPr>
+        <p:spPr>
+          <a:xfrm>
+            <a:off x="4443935" y="1573526"/>
+            <a:ext cx="1040235" cy="387073"/>
+          </a:xfrm>
+          <a:prstGeom prst="flowChartProcess">
+            <a:avLst/>
+          </a:prstGeom>
+        </p:spPr>
+        <p:style>
+          <a:lnRef idx="2">
+            <a:schemeClr val="accent1">
+              <a:shade val="50000"/>
+            </a:schemeClr>
+          </a:lnRef>
+          <a:fillRef idx="1">
+            <a:schemeClr val="accent1"/>
+          </a:fillRef>
+          <a:effectRef idx="0">
+            <a:schemeClr val="accent1"/>
+          </a:effectRef>
+          <a:fontRef idx="minor">
+            <a:schemeClr val="lt1"/>
+          </a:fontRef>
+        </p:style>
+        <p:txBody>
+          <a:bodyPr rtlCol="0" anchor="ctr"/>
+          <a:lstStyle/>
+          <a:p>
+            <a:pPr algn="ctr"/>
+            <a:r>
+              <a:rPr lang="ko-KR" altLang="en-US" sz="1000" b="1" dirty="0"/>
+              <a:t>이동 명령</a:t>
+            </a:r>
+            <a:endParaRPr lang="en-US" altLang="ko-KR" sz="1000" b="1" dirty="0"/>
+          </a:p>
+        </p:txBody>
+      </p:sp>
+      <p:sp>
+        <p:nvSpPr>
+          <p:cNvPr id="12" name="순서도: 판단 11">
+            <a:extLst>
+              <a:ext uri="{FF2B5EF4-FFF2-40B4-BE49-F238E27FC236}">
+                <a16:creationId xmlns:a16="http://schemas.microsoft.com/office/drawing/2014/main" id="{1E21016B-0043-4172-9CDD-5799E338DB7A}"/>
+              </a:ext>
+            </a:extLst>
+          </p:cNvPr>
+          <p:cNvSpPr/>
+          <p:nvPr/>
+        </p:nvSpPr>
+        <p:spPr>
+          <a:xfrm>
+            <a:off x="4213983" y="2151494"/>
+            <a:ext cx="1510017" cy="696286"/>
+          </a:xfrm>
+          <a:prstGeom prst="flowChartDecision">
+            <a:avLst/>
+          </a:prstGeom>
+        </p:spPr>
+        <p:style>
+          <a:lnRef idx="2">
+            <a:schemeClr val="accent1">
+              <a:shade val="50000"/>
+            </a:schemeClr>
+          </a:lnRef>
+          <a:fillRef idx="1">
+            <a:schemeClr val="accent1"/>
+          </a:fillRef>
+          <a:effectRef idx="0">
+            <a:schemeClr val="accent1"/>
+          </a:effectRef>
+          <a:fontRef idx="minor">
+            <a:schemeClr val="lt1"/>
+          </a:fontRef>
+        </p:style>
+        <p:txBody>
+          <a:bodyPr rtlCol="0" anchor="ctr"/>
+          <a:lstStyle/>
+          <a:p>
+            <a:pPr algn="ctr"/>
+            <a:r>
+              <a:rPr lang="ko-KR" altLang="en-US" sz="1000" b="1" dirty="0"/>
+              <a:t>캐릭터가 비행 가능</a:t>
+            </a:r>
+            <a:r>
+              <a:rPr lang="en-US" altLang="ko-KR" sz="1000" b="1" dirty="0"/>
+              <a:t>?</a:t>
+            </a:r>
+            <a:endParaRPr lang="ko-KR" altLang="en-US" sz="1000" b="1" dirty="0"/>
+          </a:p>
+        </p:txBody>
+      </p:sp>
+      <p:sp>
+        <p:nvSpPr>
+          <p:cNvPr id="14" name="순서도: 처리 13">
+            <a:extLst>
+              <a:ext uri="{FF2B5EF4-FFF2-40B4-BE49-F238E27FC236}">
+                <a16:creationId xmlns:a16="http://schemas.microsoft.com/office/drawing/2014/main" id="{A560BE34-6AF0-4795-8C3D-207A53C7985D}"/>
+              </a:ext>
+            </a:extLst>
+          </p:cNvPr>
+          <p:cNvSpPr/>
+          <p:nvPr/>
+        </p:nvSpPr>
+        <p:spPr>
+          <a:xfrm>
+            <a:off x="8465388" y="4084120"/>
+            <a:ext cx="1050110" cy="387073"/>
+          </a:xfrm>
+          <a:prstGeom prst="flowChartProcess">
+            <a:avLst/>
+          </a:prstGeom>
+        </p:spPr>
+        <p:style>
+          <a:lnRef idx="2">
+            <a:schemeClr val="accent1">
+              <a:shade val="50000"/>
+            </a:schemeClr>
+          </a:lnRef>
+          <a:fillRef idx="1">
+            <a:schemeClr val="accent1"/>
+          </a:fillRef>
+          <a:effectRef idx="0">
+            <a:schemeClr val="accent1"/>
+          </a:effectRef>
+          <a:fontRef idx="minor">
+            <a:schemeClr val="lt1"/>
+          </a:fontRef>
+        </p:style>
+        <p:txBody>
+          <a:bodyPr rtlCol="0" anchor="ctr"/>
+          <a:lstStyle/>
+          <a:p>
+            <a:pPr algn="ctr"/>
+            <a:r>
+              <a:rPr lang="ko-KR" altLang="en-US" sz="1000" b="1" dirty="0"/>
+              <a:t>이동범위 표시</a:t>
+            </a:r>
+            <a:endParaRPr lang="en-US" altLang="ko-KR" sz="1000" b="1" dirty="0"/>
+          </a:p>
+        </p:txBody>
+      </p:sp>
+      <p:sp>
+        <p:nvSpPr>
+          <p:cNvPr id="15" name="순서도: 처리 14">
+            <a:extLst>
+              <a:ext uri="{FF2B5EF4-FFF2-40B4-BE49-F238E27FC236}">
+                <a16:creationId xmlns:a16="http://schemas.microsoft.com/office/drawing/2014/main" id="{556E4249-3922-40E5-B471-8ADF29914B97}"/>
+              </a:ext>
+            </a:extLst>
+          </p:cNvPr>
+          <p:cNvSpPr/>
+          <p:nvPr/>
+        </p:nvSpPr>
+        <p:spPr>
+          <a:xfrm>
+            <a:off x="6468002" y="2306101"/>
+            <a:ext cx="1050110" cy="387073"/>
+          </a:xfrm>
+          <a:prstGeom prst="flowChartProcess">
+            <a:avLst/>
+          </a:prstGeom>
+        </p:spPr>
+        <p:style>
+          <a:lnRef idx="2">
+            <a:schemeClr val="accent1">
+              <a:shade val="50000"/>
+            </a:schemeClr>
+          </a:lnRef>
+          <a:fillRef idx="1">
+            <a:schemeClr val="accent1"/>
+          </a:fillRef>
+          <a:effectRef idx="0">
+            <a:schemeClr val="accent1"/>
+          </a:effectRef>
+          <a:fontRef idx="minor">
+            <a:schemeClr val="lt1"/>
+          </a:fontRef>
+        </p:style>
+        <p:txBody>
+          <a:bodyPr rtlCol="0" anchor="ctr"/>
+          <a:lstStyle/>
+          <a:p>
+            <a:pPr algn="ctr"/>
+            <a:r>
+              <a:rPr lang="ko-KR" altLang="en-US" sz="1000" b="1" dirty="0" err="1"/>
+              <a:t>비병</a:t>
+            </a:r>
+            <a:r>
+              <a:rPr lang="ko-KR" altLang="en-US" sz="1000" b="1" dirty="0"/>
+              <a:t> 규칙 적용</a:t>
+            </a:r>
+            <a:endParaRPr lang="en-US" altLang="ko-KR" sz="1000" b="1" dirty="0"/>
+          </a:p>
+        </p:txBody>
+      </p:sp>
+      <p:sp>
+        <p:nvSpPr>
+          <p:cNvPr id="16" name="순서도: 처리 15">
+            <a:extLst>
+              <a:ext uri="{FF2B5EF4-FFF2-40B4-BE49-F238E27FC236}">
+                <a16:creationId xmlns:a16="http://schemas.microsoft.com/office/drawing/2014/main" id="{11EDA839-1D31-4C55-8FB9-B233BFB30EA9}"/>
+              </a:ext>
+            </a:extLst>
+          </p:cNvPr>
+          <p:cNvSpPr/>
+          <p:nvPr/>
+        </p:nvSpPr>
+        <p:spPr>
+          <a:xfrm>
+            <a:off x="10061749" y="4078341"/>
+            <a:ext cx="1050110" cy="387073"/>
+          </a:xfrm>
+          <a:prstGeom prst="flowChartProcess">
+            <a:avLst/>
+          </a:prstGeom>
+        </p:spPr>
+        <p:style>
+          <a:lnRef idx="2">
+            <a:schemeClr val="accent1">
+              <a:shade val="50000"/>
+            </a:schemeClr>
+          </a:lnRef>
+          <a:fillRef idx="1">
+            <a:schemeClr val="accent1"/>
+          </a:fillRef>
+          <a:effectRef idx="0">
+            <a:schemeClr val="accent1"/>
+          </a:effectRef>
+          <a:fontRef idx="minor">
+            <a:schemeClr val="lt1"/>
+          </a:fontRef>
+        </p:style>
+        <p:txBody>
+          <a:bodyPr rtlCol="0" anchor="ctr"/>
+          <a:lstStyle/>
+          <a:p>
+            <a:pPr algn="ctr"/>
+            <a:r>
+              <a:rPr lang="ko-KR" altLang="en-US" sz="1000" b="1" dirty="0"/>
+              <a:t>목적지 지정</a:t>
+            </a:r>
+            <a:endParaRPr lang="en-US" altLang="ko-KR" sz="1000" b="1" dirty="0"/>
+          </a:p>
+        </p:txBody>
+      </p:sp>
+      <p:sp>
+        <p:nvSpPr>
+          <p:cNvPr id="17" name="순서도: 처리 16">
+            <a:extLst>
+              <a:ext uri="{FF2B5EF4-FFF2-40B4-BE49-F238E27FC236}">
+                <a16:creationId xmlns:a16="http://schemas.microsoft.com/office/drawing/2014/main" id="{4DC3F8AC-AE6D-44EE-932E-D7164F20C0D1}"/>
+              </a:ext>
+            </a:extLst>
+          </p:cNvPr>
+          <p:cNvSpPr/>
+          <p:nvPr/>
+        </p:nvSpPr>
+        <p:spPr>
+          <a:xfrm>
+            <a:off x="10048511" y="5649396"/>
+            <a:ext cx="1076586" cy="387073"/>
+          </a:xfrm>
+          <a:prstGeom prst="flowChartProcess">
+            <a:avLst/>
+          </a:prstGeom>
+        </p:spPr>
+        <p:style>
+          <a:lnRef idx="2">
+            <a:schemeClr val="accent1">
+              <a:shade val="50000"/>
+            </a:schemeClr>
+          </a:lnRef>
+          <a:fillRef idx="1">
+            <a:schemeClr val="accent1"/>
+          </a:fillRef>
+          <a:effectRef idx="0">
+            <a:schemeClr val="accent1"/>
+          </a:effectRef>
+          <a:fontRef idx="minor">
+            <a:schemeClr val="lt1"/>
+          </a:fontRef>
+        </p:style>
+        <p:txBody>
+          <a:bodyPr rtlCol="0" anchor="ctr"/>
+          <a:lstStyle/>
+          <a:p>
+            <a:pPr algn="ctr"/>
+            <a:r>
+              <a:rPr lang="ko-KR" altLang="en-US" sz="1000" b="1" dirty="0"/>
+              <a:t>캐릭터 이동</a:t>
+            </a:r>
+          </a:p>
+        </p:txBody>
+      </p:sp>
+      <p:sp>
+        <p:nvSpPr>
+          <p:cNvPr id="18" name="순서도: 판단 17">
+            <a:extLst>
+              <a:ext uri="{FF2B5EF4-FFF2-40B4-BE49-F238E27FC236}">
+                <a16:creationId xmlns:a16="http://schemas.microsoft.com/office/drawing/2014/main" id="{27B6B592-803D-4BC1-BDC6-3C4358812F8E}"/>
+              </a:ext>
+            </a:extLst>
+          </p:cNvPr>
+          <p:cNvSpPr/>
+          <p:nvPr/>
+        </p:nvSpPr>
+        <p:spPr>
+          <a:xfrm>
+            <a:off x="9831795" y="4712152"/>
+            <a:ext cx="1510017" cy="696286"/>
+          </a:xfrm>
+          <a:prstGeom prst="flowChartDecision">
+            <a:avLst/>
+          </a:prstGeom>
+        </p:spPr>
+        <p:style>
+          <a:lnRef idx="2">
+            <a:schemeClr val="accent1">
+              <a:shade val="50000"/>
+            </a:schemeClr>
+          </a:lnRef>
+          <a:fillRef idx="1">
+            <a:schemeClr val="accent1"/>
+          </a:fillRef>
+          <a:effectRef idx="0">
+            <a:schemeClr val="accent1"/>
+          </a:effectRef>
+          <a:fontRef idx="minor">
+            <a:schemeClr val="lt1"/>
+          </a:fontRef>
+        </p:style>
+        <p:txBody>
+          <a:bodyPr rtlCol="0" anchor="ctr"/>
+          <a:lstStyle/>
+          <a:p>
+            <a:pPr algn="ctr"/>
+            <a:r>
+              <a:rPr lang="ko-KR" altLang="en-US" sz="1000" b="1" dirty="0"/>
+              <a:t>이동 가능 지점</a:t>
+            </a:r>
+            <a:r>
+              <a:rPr lang="en-US" altLang="ko-KR" sz="1000" b="1" dirty="0"/>
+              <a:t>?</a:t>
+            </a:r>
+            <a:endParaRPr lang="ko-KR" altLang="en-US" sz="1000" b="1" dirty="0"/>
+          </a:p>
+        </p:txBody>
+      </p:sp>
+      <p:cxnSp>
+        <p:nvCxnSpPr>
+          <p:cNvPr id="20" name="직선 화살표 연결선 19">
+            <a:extLst>
+              <a:ext uri="{FF2B5EF4-FFF2-40B4-BE49-F238E27FC236}">
+                <a16:creationId xmlns:a16="http://schemas.microsoft.com/office/drawing/2014/main" id="{5A169A1F-A0E3-479D-B2D7-78A69CCC4F9F}"/>
+              </a:ext>
+            </a:extLst>
+          </p:cNvPr>
+          <p:cNvCxnSpPr>
+            <a:stCxn id="6" idx="3"/>
+            <a:endCxn id="11" idx="1"/>
+          </p:cNvCxnSpPr>
+          <p:nvPr/>
+        </p:nvCxnSpPr>
+        <p:spPr>
+          <a:xfrm>
+            <a:off x="3343013" y="1767063"/>
+            <a:ext cx="1100922" cy="0"/>
+          </a:xfrm>
+          <a:prstGeom prst="straightConnector1">
+            <a:avLst/>
+          </a:prstGeom>
+          <a:ln>
+            <a:tailEnd type="triangle"/>
+          </a:ln>
+        </p:spPr>
+        <p:style>
+          <a:lnRef idx="1">
+            <a:schemeClr val="accent1"/>
+          </a:lnRef>
+          <a:fillRef idx="0">
+            <a:schemeClr val="accent1"/>
+          </a:fillRef>
+          <a:effectRef idx="0">
+            <a:schemeClr val="accent1"/>
+          </a:effectRef>
+          <a:fontRef idx="minor">
+            <a:schemeClr val="tx1"/>
+          </a:fontRef>
+        </p:style>
+      </p:cxnSp>
+      <p:cxnSp>
+        <p:nvCxnSpPr>
+          <p:cNvPr id="22" name="직선 화살표 연결선 21">
+            <a:extLst>
+              <a:ext uri="{FF2B5EF4-FFF2-40B4-BE49-F238E27FC236}">
+                <a16:creationId xmlns:a16="http://schemas.microsoft.com/office/drawing/2014/main" id="{AF9E4DCF-C1CA-4C55-96D7-1AA808787161}"/>
+              </a:ext>
+            </a:extLst>
+          </p:cNvPr>
+          <p:cNvCxnSpPr>
+            <a:cxnSpLocks/>
+            <a:stCxn id="12" idx="2"/>
+            <a:endCxn id="88" idx="0"/>
+          </p:cNvCxnSpPr>
+          <p:nvPr/>
+        </p:nvCxnSpPr>
+        <p:spPr>
+          <a:xfrm flipH="1">
+            <a:off x="4964052" y="2847780"/>
+            <a:ext cx="4940" cy="233077"/>
+          </a:xfrm>
+          <a:prstGeom prst="straightConnector1">
+            <a:avLst/>
+          </a:prstGeom>
+          <a:ln>
+            <a:solidFill>
+              <a:srgbClr val="FF0000"/>
+            </a:solidFill>
+            <a:tailEnd type="triangle"/>
+          </a:ln>
+        </p:spPr>
+        <p:style>
+          <a:lnRef idx="1">
+            <a:schemeClr val="accent1"/>
+          </a:lnRef>
+          <a:fillRef idx="0">
+            <a:schemeClr val="accent1"/>
+          </a:fillRef>
+          <a:effectRef idx="0">
+            <a:schemeClr val="accent1"/>
+          </a:effectRef>
+          <a:fontRef idx="minor">
+            <a:schemeClr val="tx1"/>
+          </a:fontRef>
+        </p:style>
+      </p:cxnSp>
+      <p:cxnSp>
+        <p:nvCxnSpPr>
+          <p:cNvPr id="26" name="직선 화살표 연결선 25">
+            <a:extLst>
+              <a:ext uri="{FF2B5EF4-FFF2-40B4-BE49-F238E27FC236}">
+                <a16:creationId xmlns:a16="http://schemas.microsoft.com/office/drawing/2014/main" id="{88105652-BDD0-4F9C-A04B-7BA91CFB43BB}"/>
+              </a:ext>
+            </a:extLst>
+          </p:cNvPr>
+          <p:cNvCxnSpPr>
+            <a:cxnSpLocks/>
+            <a:stCxn id="12" idx="3"/>
+            <a:endCxn id="15" idx="1"/>
+          </p:cNvCxnSpPr>
+          <p:nvPr/>
+        </p:nvCxnSpPr>
+        <p:spPr>
+          <a:xfrm>
+            <a:off x="5724000" y="2499637"/>
+            <a:ext cx="744002" cy="1"/>
+          </a:xfrm>
+          <a:prstGeom prst="straightConnector1">
+            <a:avLst/>
+          </a:prstGeom>
+          <a:ln>
+            <a:tailEnd type="triangle"/>
+          </a:ln>
+        </p:spPr>
+        <p:style>
+          <a:lnRef idx="1">
+            <a:schemeClr val="accent1"/>
+          </a:lnRef>
+          <a:fillRef idx="0">
+            <a:schemeClr val="accent1"/>
+          </a:fillRef>
+          <a:effectRef idx="0">
+            <a:schemeClr val="accent1"/>
+          </a:effectRef>
+          <a:fontRef idx="minor">
+            <a:schemeClr val="tx1"/>
+          </a:fontRef>
+        </p:style>
+      </p:cxnSp>
+      <p:cxnSp>
+        <p:nvCxnSpPr>
+          <p:cNvPr id="30" name="직선 화살표 연결선 29">
+            <a:extLst>
+              <a:ext uri="{FF2B5EF4-FFF2-40B4-BE49-F238E27FC236}">
+                <a16:creationId xmlns:a16="http://schemas.microsoft.com/office/drawing/2014/main" id="{B2EE9DC8-6E79-4672-B67C-0B3DCA2AB662}"/>
+              </a:ext>
+            </a:extLst>
+          </p:cNvPr>
+          <p:cNvCxnSpPr>
+            <a:cxnSpLocks/>
+            <a:stCxn id="14" idx="3"/>
+            <a:endCxn id="16" idx="1"/>
+          </p:cNvCxnSpPr>
+          <p:nvPr/>
+        </p:nvCxnSpPr>
+        <p:spPr>
+          <a:xfrm flipV="1">
+            <a:off x="9515498" y="4271878"/>
+            <a:ext cx="546251" cy="5779"/>
+          </a:xfrm>
+          <a:prstGeom prst="straightConnector1">
+            <a:avLst/>
+          </a:prstGeom>
+          <a:ln>
+            <a:solidFill>
+              <a:schemeClr val="tx1"/>
+            </a:solidFill>
+            <a:tailEnd type="triangle"/>
+          </a:ln>
+        </p:spPr>
+        <p:style>
+          <a:lnRef idx="1">
+            <a:schemeClr val="accent1"/>
+          </a:lnRef>
+          <a:fillRef idx="0">
+            <a:schemeClr val="accent1"/>
+          </a:fillRef>
+          <a:effectRef idx="0">
+            <a:schemeClr val="accent1"/>
+          </a:effectRef>
+          <a:fontRef idx="minor">
+            <a:schemeClr val="tx1"/>
+          </a:fontRef>
+        </p:style>
+      </p:cxnSp>
+      <p:cxnSp>
+        <p:nvCxnSpPr>
+          <p:cNvPr id="37" name="직선 화살표 연결선 36">
+            <a:extLst>
+              <a:ext uri="{FF2B5EF4-FFF2-40B4-BE49-F238E27FC236}">
+                <a16:creationId xmlns:a16="http://schemas.microsoft.com/office/drawing/2014/main" id="{035335FF-66D3-4F32-ADDF-888456A08F1E}"/>
+              </a:ext>
+            </a:extLst>
+          </p:cNvPr>
+          <p:cNvCxnSpPr>
+            <a:stCxn id="18" idx="2"/>
+            <a:endCxn id="17" idx="0"/>
+          </p:cNvCxnSpPr>
+          <p:nvPr/>
+        </p:nvCxnSpPr>
+        <p:spPr>
+          <a:xfrm>
+            <a:off x="10586804" y="5408438"/>
+            <a:ext cx="0" cy="240958"/>
+          </a:xfrm>
+          <a:prstGeom prst="straightConnector1">
+            <a:avLst/>
+          </a:prstGeom>
+          <a:ln>
+            <a:tailEnd type="triangle"/>
+          </a:ln>
+        </p:spPr>
+        <p:style>
+          <a:lnRef idx="1">
+            <a:schemeClr val="accent1"/>
+          </a:lnRef>
+          <a:fillRef idx="0">
+            <a:schemeClr val="accent1"/>
+          </a:fillRef>
+          <a:effectRef idx="0">
+            <a:schemeClr val="accent1"/>
+          </a:effectRef>
+          <a:fontRef idx="minor">
+            <a:schemeClr val="tx1"/>
+          </a:fontRef>
+        </p:style>
+      </p:cxnSp>
+      <p:cxnSp>
+        <p:nvCxnSpPr>
+          <p:cNvPr id="39" name="연결선: 꺾임 38">
+            <a:extLst>
+              <a:ext uri="{FF2B5EF4-FFF2-40B4-BE49-F238E27FC236}">
+                <a16:creationId xmlns:a16="http://schemas.microsoft.com/office/drawing/2014/main" id="{E7B3DE62-E389-420A-BA8B-12DBB149D62D}"/>
+              </a:ext>
+            </a:extLst>
+          </p:cNvPr>
+          <p:cNvCxnSpPr>
+            <a:cxnSpLocks/>
+            <a:stCxn id="6" idx="1"/>
+          </p:cNvCxnSpPr>
+          <p:nvPr/>
+        </p:nvCxnSpPr>
+        <p:spPr>
+          <a:xfrm rot="10800000" flipH="1" flipV="1">
+            <a:off x="1832995" y="1767063"/>
+            <a:ext cx="8753807" cy="4436596"/>
+          </a:xfrm>
+          <a:prstGeom prst="bentConnector3">
+            <a:avLst>
+              <a:gd name="adj1" fmla="val -2611"/>
+            </a:avLst>
+          </a:prstGeom>
+          <a:ln>
+            <a:solidFill>
+              <a:srgbClr val="FF0000"/>
+            </a:solidFill>
+            <a:tailEnd type="triangle"/>
+          </a:ln>
+        </p:spPr>
+        <p:style>
+          <a:lnRef idx="1">
+            <a:schemeClr val="accent1"/>
+          </a:lnRef>
+          <a:fillRef idx="0">
+            <a:schemeClr val="accent1"/>
+          </a:fillRef>
+          <a:effectRef idx="0">
+            <a:schemeClr val="accent1"/>
+          </a:effectRef>
+          <a:fontRef idx="minor">
+            <a:schemeClr val="tx1"/>
+          </a:fontRef>
+        </p:style>
+      </p:cxnSp>
+      <p:cxnSp>
+        <p:nvCxnSpPr>
+          <p:cNvPr id="44" name="직선 화살표 연결선 43">
+            <a:extLst>
+              <a:ext uri="{FF2B5EF4-FFF2-40B4-BE49-F238E27FC236}">
+                <a16:creationId xmlns:a16="http://schemas.microsoft.com/office/drawing/2014/main" id="{4162E414-3943-40A9-89CB-F9B8D797CFD5}"/>
+              </a:ext>
+            </a:extLst>
+          </p:cNvPr>
+          <p:cNvCxnSpPr>
+            <a:cxnSpLocks/>
+            <a:stCxn id="18" idx="1"/>
+          </p:cNvCxnSpPr>
+          <p:nvPr/>
+        </p:nvCxnSpPr>
+        <p:spPr>
+          <a:xfrm rot="10800000" flipV="1">
+            <a:off x="8599025" y="5060295"/>
+            <a:ext cx="1232770" cy="1143364"/>
+          </a:xfrm>
+          <a:prstGeom prst="bentConnector3">
+            <a:avLst>
+              <a:gd name="adj1" fmla="val 99676"/>
+            </a:avLst>
+          </a:prstGeom>
+          <a:ln>
+            <a:solidFill>
+              <a:srgbClr val="FF0000"/>
+            </a:solidFill>
+            <a:tailEnd type="triangle"/>
+          </a:ln>
+        </p:spPr>
+        <p:style>
+          <a:lnRef idx="1">
+            <a:schemeClr val="accent1"/>
+          </a:lnRef>
+          <a:fillRef idx="0">
+            <a:schemeClr val="accent1"/>
+          </a:fillRef>
+          <a:effectRef idx="0">
+            <a:schemeClr val="accent1"/>
+          </a:effectRef>
+          <a:fontRef idx="minor">
+            <a:schemeClr val="tx1"/>
+          </a:fontRef>
+        </p:style>
+      </p:cxnSp>
+      <p:cxnSp>
+        <p:nvCxnSpPr>
+          <p:cNvPr id="46" name="직선 화살표 연결선 45">
+            <a:extLst>
+              <a:ext uri="{FF2B5EF4-FFF2-40B4-BE49-F238E27FC236}">
+                <a16:creationId xmlns:a16="http://schemas.microsoft.com/office/drawing/2014/main" id="{039A8A5B-3FA5-4928-A64C-C88CC2DDCADE}"/>
+              </a:ext>
+            </a:extLst>
+          </p:cNvPr>
+          <p:cNvCxnSpPr>
+            <a:stCxn id="3" idx="2"/>
+            <a:endCxn id="4" idx="0"/>
+          </p:cNvCxnSpPr>
+          <p:nvPr/>
+        </p:nvCxnSpPr>
+        <p:spPr>
+          <a:xfrm>
+            <a:off x="2588005" y="654341"/>
+            <a:ext cx="0" cy="159391"/>
+          </a:xfrm>
+          <a:prstGeom prst="straightConnector1">
+            <a:avLst/>
+          </a:prstGeom>
+          <a:ln>
+            <a:solidFill>
+              <a:schemeClr val="tx1"/>
+            </a:solidFill>
+            <a:tailEnd type="triangle"/>
+          </a:ln>
+        </p:spPr>
+        <p:style>
+          <a:lnRef idx="1">
+            <a:schemeClr val="accent1"/>
+          </a:lnRef>
+          <a:fillRef idx="0">
+            <a:schemeClr val="accent1"/>
+          </a:fillRef>
+          <a:effectRef idx="0">
+            <a:schemeClr val="accent1"/>
+          </a:effectRef>
+          <a:fontRef idx="minor">
+            <a:schemeClr val="tx1"/>
+          </a:fontRef>
+        </p:style>
+      </p:cxnSp>
+      <p:cxnSp>
+        <p:nvCxnSpPr>
+          <p:cNvPr id="48" name="직선 화살표 연결선 47">
+            <a:extLst>
+              <a:ext uri="{FF2B5EF4-FFF2-40B4-BE49-F238E27FC236}">
+                <a16:creationId xmlns:a16="http://schemas.microsoft.com/office/drawing/2014/main" id="{F0543459-7B92-4CEC-819A-5F474D698488}"/>
+              </a:ext>
+            </a:extLst>
+          </p:cNvPr>
+          <p:cNvCxnSpPr>
+            <a:cxnSpLocks/>
+            <a:stCxn id="4" idx="2"/>
+            <a:endCxn id="6" idx="0"/>
+          </p:cNvCxnSpPr>
+          <p:nvPr/>
+        </p:nvCxnSpPr>
+        <p:spPr>
+          <a:xfrm>
+            <a:off x="2588005" y="1200805"/>
+            <a:ext cx="0" cy="218115"/>
+          </a:xfrm>
+          <a:prstGeom prst="straightConnector1">
+            <a:avLst/>
+          </a:prstGeom>
+          <a:ln>
+            <a:solidFill>
+              <a:schemeClr val="tx1"/>
+            </a:solidFill>
+            <a:tailEnd type="triangle"/>
+          </a:ln>
+        </p:spPr>
+        <p:style>
+          <a:lnRef idx="1">
+            <a:schemeClr val="accent1"/>
+          </a:lnRef>
+          <a:fillRef idx="0">
+            <a:schemeClr val="accent1"/>
+          </a:fillRef>
+          <a:effectRef idx="0">
+            <a:schemeClr val="accent1"/>
+          </a:effectRef>
+          <a:fontRef idx="minor">
+            <a:schemeClr val="tx1"/>
+          </a:fontRef>
+        </p:style>
+      </p:cxnSp>
+      <p:cxnSp>
+        <p:nvCxnSpPr>
+          <p:cNvPr id="53" name="직선 화살표 연결선 52">
+            <a:extLst>
+              <a:ext uri="{FF2B5EF4-FFF2-40B4-BE49-F238E27FC236}">
+                <a16:creationId xmlns:a16="http://schemas.microsoft.com/office/drawing/2014/main" id="{9040694C-4741-4630-AF90-A92E6CFDAE5B}"/>
+              </a:ext>
+            </a:extLst>
+          </p:cNvPr>
+          <p:cNvCxnSpPr>
+            <a:cxnSpLocks/>
+            <a:stCxn id="11" idx="2"/>
+            <a:endCxn id="12" idx="0"/>
+          </p:cNvCxnSpPr>
+          <p:nvPr/>
+        </p:nvCxnSpPr>
+        <p:spPr>
+          <a:xfrm>
+            <a:off x="4964053" y="1960599"/>
+            <a:ext cx="4939" cy="190895"/>
+          </a:xfrm>
+          <a:prstGeom prst="straightConnector1">
+            <a:avLst/>
+          </a:prstGeom>
+          <a:ln>
+            <a:solidFill>
+              <a:schemeClr val="tx1"/>
+            </a:solidFill>
+            <a:tailEnd type="triangle"/>
+          </a:ln>
+        </p:spPr>
+        <p:style>
+          <a:lnRef idx="1">
+            <a:schemeClr val="accent1"/>
+          </a:lnRef>
+          <a:fillRef idx="0">
+            <a:schemeClr val="accent1"/>
+          </a:fillRef>
+          <a:effectRef idx="0">
+            <a:schemeClr val="accent1"/>
+          </a:effectRef>
+          <a:fontRef idx="minor">
+            <a:schemeClr val="tx1"/>
+          </a:fontRef>
+        </p:style>
+      </p:cxnSp>
+      <p:sp>
+        <p:nvSpPr>
+          <p:cNvPr id="88" name="순서도: 판단 87">
+            <a:extLst>
+              <a:ext uri="{FF2B5EF4-FFF2-40B4-BE49-F238E27FC236}">
+                <a16:creationId xmlns:a16="http://schemas.microsoft.com/office/drawing/2014/main" id="{B002CA49-A2DD-411C-8051-C4247E850E8C}"/>
+              </a:ext>
+            </a:extLst>
+          </p:cNvPr>
+          <p:cNvSpPr/>
+          <p:nvPr/>
+        </p:nvSpPr>
+        <p:spPr>
+          <a:xfrm>
+            <a:off x="4006353" y="3080857"/>
+            <a:ext cx="1915398" cy="696286"/>
+          </a:xfrm>
+          <a:prstGeom prst="flowChartDecision">
+            <a:avLst/>
+          </a:prstGeom>
+        </p:spPr>
+        <p:style>
+          <a:lnRef idx="2">
+            <a:schemeClr val="accent1">
+              <a:shade val="50000"/>
+            </a:schemeClr>
+          </a:lnRef>
+          <a:fillRef idx="1">
+            <a:schemeClr val="accent1"/>
+          </a:fillRef>
+          <a:effectRef idx="0">
+            <a:schemeClr val="accent1"/>
+          </a:effectRef>
+          <a:fontRef idx="minor">
+            <a:schemeClr val="lt1"/>
+          </a:fontRef>
+        </p:style>
+        <p:txBody>
+          <a:bodyPr rtlCol="0" anchor="ctr"/>
+          <a:lstStyle/>
+          <a:p>
+            <a:pPr algn="ctr"/>
+            <a:r>
+              <a:rPr lang="ko-KR" altLang="en-US" sz="1000" b="1" dirty="0"/>
+              <a:t>늪지대에서 이동 가능</a:t>
+            </a:r>
+            <a:r>
+              <a:rPr lang="en-US" altLang="ko-KR" sz="1000" b="1" dirty="0"/>
+              <a:t>?</a:t>
+            </a:r>
+            <a:r>
+              <a:rPr lang="ko-KR" altLang="en-US" sz="1000" b="1" dirty="0"/>
+              <a:t> </a:t>
+            </a:r>
+          </a:p>
+        </p:txBody>
+      </p:sp>
+      <p:cxnSp>
+        <p:nvCxnSpPr>
+          <p:cNvPr id="94" name="직선 화살표 연결선 93">
+            <a:extLst>
+              <a:ext uri="{FF2B5EF4-FFF2-40B4-BE49-F238E27FC236}">
+                <a16:creationId xmlns:a16="http://schemas.microsoft.com/office/drawing/2014/main" id="{CE4D2539-0D7D-4C9F-A5C3-07E2141B6EE1}"/>
+              </a:ext>
+            </a:extLst>
+          </p:cNvPr>
+          <p:cNvCxnSpPr>
+            <a:cxnSpLocks/>
+            <a:stCxn id="88" idx="3"/>
+          </p:cNvCxnSpPr>
+          <p:nvPr/>
+        </p:nvCxnSpPr>
+        <p:spPr>
+          <a:xfrm flipV="1">
+            <a:off x="5921751" y="2499637"/>
+            <a:ext cx="186000" cy="929363"/>
+          </a:xfrm>
+          <a:prstGeom prst="bentConnector2">
+            <a:avLst/>
+          </a:prstGeom>
+          <a:ln>
+            <a:tailEnd type="triangle"/>
+          </a:ln>
+        </p:spPr>
+        <p:style>
+          <a:lnRef idx="1">
+            <a:schemeClr val="accent1"/>
+          </a:lnRef>
+          <a:fillRef idx="0">
+            <a:schemeClr val="accent1"/>
+          </a:fillRef>
+          <a:effectRef idx="0">
+            <a:schemeClr val="accent1"/>
+          </a:effectRef>
+          <a:fontRef idx="minor">
+            <a:schemeClr val="tx1"/>
+          </a:fontRef>
+        </p:style>
+      </p:cxnSp>
+      <p:cxnSp>
+        <p:nvCxnSpPr>
+          <p:cNvPr id="97" name="직선 화살표 연결선 93">
+            <a:extLst>
+              <a:ext uri="{FF2B5EF4-FFF2-40B4-BE49-F238E27FC236}">
+                <a16:creationId xmlns:a16="http://schemas.microsoft.com/office/drawing/2014/main" id="{C2089E13-894B-4D12-81F1-6B02F7B38344}"/>
+              </a:ext>
+            </a:extLst>
+          </p:cNvPr>
+          <p:cNvCxnSpPr>
+            <a:cxnSpLocks/>
+            <a:stCxn id="88" idx="3"/>
+            <a:endCxn id="100" idx="1"/>
+          </p:cNvCxnSpPr>
+          <p:nvPr/>
+        </p:nvCxnSpPr>
+        <p:spPr>
+          <a:xfrm>
+            <a:off x="5921751" y="3429000"/>
+            <a:ext cx="546250" cy="0"/>
+          </a:xfrm>
+          <a:prstGeom prst="straightConnector1">
+            <a:avLst/>
+          </a:prstGeom>
+          <a:ln>
+            <a:tailEnd type="triangle"/>
+          </a:ln>
+        </p:spPr>
+        <p:style>
+          <a:lnRef idx="1">
+            <a:schemeClr val="accent1"/>
+          </a:lnRef>
+          <a:fillRef idx="0">
+            <a:schemeClr val="accent1"/>
+          </a:fillRef>
+          <a:effectRef idx="0">
+            <a:schemeClr val="accent1"/>
+          </a:effectRef>
+          <a:fontRef idx="minor">
+            <a:schemeClr val="tx1"/>
+          </a:fontRef>
+        </p:style>
+      </p:cxnSp>
+      <p:sp>
+        <p:nvSpPr>
+          <p:cNvPr id="100" name="순서도: 처리 99">
+            <a:extLst>
+              <a:ext uri="{FF2B5EF4-FFF2-40B4-BE49-F238E27FC236}">
+                <a16:creationId xmlns:a16="http://schemas.microsoft.com/office/drawing/2014/main" id="{76F24D51-EE93-4077-B161-986D81DB3FFA}"/>
+              </a:ext>
+            </a:extLst>
+          </p:cNvPr>
+          <p:cNvSpPr/>
+          <p:nvPr/>
+        </p:nvSpPr>
+        <p:spPr>
+          <a:xfrm>
+            <a:off x="6468001" y="3235463"/>
+            <a:ext cx="1369147" cy="387073"/>
+          </a:xfrm>
+          <a:prstGeom prst="flowChartProcess">
+            <a:avLst/>
+          </a:prstGeom>
+        </p:spPr>
+        <p:style>
+          <a:lnRef idx="2">
+            <a:schemeClr val="accent1">
+              <a:shade val="50000"/>
+            </a:schemeClr>
+          </a:lnRef>
+          <a:fillRef idx="1">
+            <a:schemeClr val="accent1"/>
+          </a:fillRef>
+          <a:effectRef idx="0">
+            <a:schemeClr val="accent1"/>
+          </a:effectRef>
+          <a:fontRef idx="minor">
+            <a:schemeClr val="lt1"/>
+          </a:fontRef>
+        </p:style>
+        <p:txBody>
+          <a:bodyPr rtlCol="0" anchor="ctr"/>
+          <a:lstStyle/>
+          <a:p>
+            <a:pPr algn="ctr"/>
+            <a:r>
+              <a:rPr lang="ko-KR" altLang="en-US" sz="1000" b="1"/>
+              <a:t>조사병단 </a:t>
+            </a:r>
+            <a:r>
+              <a:rPr lang="ko-KR" altLang="en-US" sz="1000" b="1" dirty="0"/>
+              <a:t>규칙 적용</a:t>
+            </a:r>
+            <a:endParaRPr lang="en-US" altLang="ko-KR" sz="1000" b="1" dirty="0"/>
+          </a:p>
+        </p:txBody>
+      </p:sp>
+      <p:cxnSp>
+        <p:nvCxnSpPr>
+          <p:cNvPr id="111" name="직선 화살표 연결선 110">
+            <a:extLst>
+              <a:ext uri="{FF2B5EF4-FFF2-40B4-BE49-F238E27FC236}">
+                <a16:creationId xmlns:a16="http://schemas.microsoft.com/office/drawing/2014/main" id="{6B28A5E0-D4B0-4249-AA10-3E6FD2036160}"/>
+              </a:ext>
+            </a:extLst>
+          </p:cNvPr>
+          <p:cNvCxnSpPr>
+            <a:cxnSpLocks/>
+            <a:stCxn id="88" idx="2"/>
+            <a:endCxn id="10" idx="1"/>
+          </p:cNvCxnSpPr>
+          <p:nvPr/>
+        </p:nvCxnSpPr>
+        <p:spPr>
+          <a:xfrm rot="16200000" flipH="1">
+            <a:off x="5552189" y="3189006"/>
+            <a:ext cx="301201" cy="1477474"/>
+          </a:xfrm>
+          <a:prstGeom prst="bentConnector2">
+            <a:avLst/>
+          </a:prstGeom>
+          <a:ln>
+            <a:solidFill>
+              <a:srgbClr val="FF0000"/>
+            </a:solidFill>
+            <a:tailEnd type="triangle"/>
+          </a:ln>
+        </p:spPr>
+        <p:style>
+          <a:lnRef idx="1">
+            <a:schemeClr val="accent1"/>
+          </a:lnRef>
+          <a:fillRef idx="0">
+            <a:schemeClr val="accent1"/>
+          </a:fillRef>
+          <a:effectRef idx="0">
+            <a:schemeClr val="accent1"/>
+          </a:effectRef>
+          <a:fontRef idx="minor">
+            <a:schemeClr val="tx1"/>
+          </a:fontRef>
+        </p:style>
+      </p:cxnSp>
+      <p:sp>
+        <p:nvSpPr>
+          <p:cNvPr id="114" name="순서도: 처리 113">
+            <a:extLst>
+              <a:ext uri="{FF2B5EF4-FFF2-40B4-BE49-F238E27FC236}">
+                <a16:creationId xmlns:a16="http://schemas.microsoft.com/office/drawing/2014/main" id="{2167B7CC-7C83-4715-8F2A-E0A364F756E0}"/>
+              </a:ext>
+            </a:extLst>
+          </p:cNvPr>
+          <p:cNvSpPr/>
+          <p:nvPr/>
+        </p:nvSpPr>
+        <p:spPr>
+          <a:xfrm>
+            <a:off x="6445854" y="4453576"/>
+            <a:ext cx="1076586" cy="387073"/>
+          </a:xfrm>
+          <a:prstGeom prst="flowChartProcess">
+            <a:avLst/>
+          </a:prstGeom>
+        </p:spPr>
+        <p:style>
+          <a:lnRef idx="2">
+            <a:schemeClr val="accent1">
+              <a:shade val="50000"/>
+            </a:schemeClr>
+          </a:lnRef>
+          <a:fillRef idx="1">
+            <a:schemeClr val="accent1"/>
+          </a:fillRef>
+          <a:effectRef idx="0">
+            <a:schemeClr val="accent1"/>
+          </a:effectRef>
+          <a:fontRef idx="minor">
+            <a:schemeClr val="lt1"/>
+          </a:fontRef>
+        </p:style>
+        <p:txBody>
+          <a:bodyPr rtlCol="0" anchor="ctr"/>
+          <a:lstStyle/>
+          <a:p>
+            <a:pPr algn="ctr"/>
+            <a:r>
+              <a:rPr lang="ko-KR" altLang="en-US" sz="1000" b="1" dirty="0"/>
+              <a:t>기병 규칙 적용</a:t>
+            </a:r>
+          </a:p>
+        </p:txBody>
+      </p:sp>
+      <p:cxnSp>
+        <p:nvCxnSpPr>
+          <p:cNvPr id="115" name="직선 화살표 연결선 110">
+            <a:extLst>
+              <a:ext uri="{FF2B5EF4-FFF2-40B4-BE49-F238E27FC236}">
+                <a16:creationId xmlns:a16="http://schemas.microsoft.com/office/drawing/2014/main" id="{87736062-4391-4C27-B7A0-B675DFBA08F8}"/>
+              </a:ext>
+            </a:extLst>
+          </p:cNvPr>
+          <p:cNvCxnSpPr>
+            <a:cxnSpLocks/>
+            <a:stCxn id="88" idx="2"/>
+            <a:endCxn id="114" idx="1"/>
+          </p:cNvCxnSpPr>
+          <p:nvPr/>
+        </p:nvCxnSpPr>
+        <p:spPr>
+          <a:xfrm rot="16200000" flipH="1">
+            <a:off x="5269968" y="3471227"/>
+            <a:ext cx="869970" cy="1481802"/>
+          </a:xfrm>
+          <a:prstGeom prst="bentConnector2">
+            <a:avLst/>
+          </a:prstGeom>
+          <a:ln>
+            <a:solidFill>
+              <a:srgbClr val="FF0000"/>
+            </a:solidFill>
+            <a:tailEnd type="triangle"/>
+          </a:ln>
+        </p:spPr>
+        <p:style>
+          <a:lnRef idx="1">
+            <a:schemeClr val="accent1"/>
+          </a:lnRef>
+          <a:fillRef idx="0">
+            <a:schemeClr val="accent1"/>
+          </a:fillRef>
+          <a:effectRef idx="0">
+            <a:schemeClr val="accent1"/>
+          </a:effectRef>
+          <a:fontRef idx="minor">
+            <a:schemeClr val="tx1"/>
+          </a:fontRef>
+        </p:style>
+      </p:cxnSp>
+      <p:sp>
+        <p:nvSpPr>
+          <p:cNvPr id="118" name="순서도: 처리 117">
+            <a:extLst>
+              <a:ext uri="{FF2B5EF4-FFF2-40B4-BE49-F238E27FC236}">
+                <a16:creationId xmlns:a16="http://schemas.microsoft.com/office/drawing/2014/main" id="{0AE86EA2-CA18-4EBB-B7E0-E96D64659B50}"/>
+              </a:ext>
+            </a:extLst>
+          </p:cNvPr>
+          <p:cNvSpPr/>
+          <p:nvPr/>
+        </p:nvSpPr>
+        <p:spPr>
+          <a:xfrm>
+            <a:off x="6445854" y="5003517"/>
+            <a:ext cx="1076586" cy="387073"/>
+          </a:xfrm>
+          <a:prstGeom prst="flowChartProcess">
+            <a:avLst/>
+          </a:prstGeom>
+        </p:spPr>
+        <p:style>
+          <a:lnRef idx="2">
+            <a:schemeClr val="accent1">
+              <a:shade val="50000"/>
+            </a:schemeClr>
+          </a:lnRef>
+          <a:fillRef idx="1">
+            <a:schemeClr val="accent1"/>
+          </a:fillRef>
+          <a:effectRef idx="0">
+            <a:schemeClr val="accent1"/>
+          </a:effectRef>
+          <a:fontRef idx="minor">
+            <a:schemeClr val="lt1"/>
+          </a:fontRef>
+        </p:style>
+        <p:txBody>
+          <a:bodyPr rtlCol="0" anchor="ctr"/>
+          <a:lstStyle/>
+          <a:p>
+            <a:pPr algn="ctr"/>
+            <a:r>
+              <a:rPr lang="ko-KR" altLang="en-US" sz="1000" b="1" dirty="0"/>
+              <a:t>수병 규칙 적용</a:t>
+            </a:r>
+          </a:p>
+        </p:txBody>
+      </p:sp>
+      <p:cxnSp>
+        <p:nvCxnSpPr>
+          <p:cNvPr id="119" name="직선 화살표 연결선 110">
+            <a:extLst>
+              <a:ext uri="{FF2B5EF4-FFF2-40B4-BE49-F238E27FC236}">
+                <a16:creationId xmlns:a16="http://schemas.microsoft.com/office/drawing/2014/main" id="{5D6E0400-5EB0-492F-AA65-ED5D4EE3C257}"/>
+              </a:ext>
+            </a:extLst>
+          </p:cNvPr>
+          <p:cNvCxnSpPr>
+            <a:cxnSpLocks/>
+            <a:stCxn id="88" idx="2"/>
+            <a:endCxn id="118" idx="1"/>
+          </p:cNvCxnSpPr>
+          <p:nvPr/>
+        </p:nvCxnSpPr>
+        <p:spPr>
+          <a:xfrm rot="16200000" flipH="1">
+            <a:off x="4994998" y="3746197"/>
+            <a:ext cx="1419911" cy="1481802"/>
+          </a:xfrm>
+          <a:prstGeom prst="bentConnector2">
+            <a:avLst/>
+          </a:prstGeom>
+          <a:ln>
+            <a:solidFill>
+              <a:srgbClr val="FF0000"/>
+            </a:solidFill>
+            <a:tailEnd type="triangle"/>
+          </a:ln>
+        </p:spPr>
+        <p:style>
+          <a:lnRef idx="1">
+            <a:schemeClr val="accent1"/>
+          </a:lnRef>
+          <a:fillRef idx="0">
+            <a:schemeClr val="accent1"/>
+          </a:fillRef>
+          <a:effectRef idx="0">
+            <a:schemeClr val="accent1"/>
+          </a:effectRef>
+          <a:fontRef idx="minor">
+            <a:schemeClr val="tx1"/>
+          </a:fontRef>
+        </p:style>
+      </p:cxnSp>
+      <p:cxnSp>
+        <p:nvCxnSpPr>
+          <p:cNvPr id="122" name="직선 화살표 연결선 110">
+            <a:extLst>
+              <a:ext uri="{FF2B5EF4-FFF2-40B4-BE49-F238E27FC236}">
+                <a16:creationId xmlns:a16="http://schemas.microsoft.com/office/drawing/2014/main" id="{75A32F41-177C-4F2A-A0AB-CEE287ED1AA8}"/>
+              </a:ext>
+            </a:extLst>
+          </p:cNvPr>
+          <p:cNvCxnSpPr>
+            <a:cxnSpLocks/>
+            <a:stCxn id="88" idx="2"/>
+            <a:endCxn id="123" idx="1"/>
+          </p:cNvCxnSpPr>
+          <p:nvPr/>
+        </p:nvCxnSpPr>
+        <p:spPr>
+          <a:xfrm rot="16200000" flipH="1">
+            <a:off x="4721995" y="4019200"/>
+            <a:ext cx="1961589" cy="1477474"/>
+          </a:xfrm>
+          <a:prstGeom prst="bentConnector2">
+            <a:avLst/>
+          </a:prstGeom>
+          <a:ln>
+            <a:solidFill>
+              <a:srgbClr val="FF0000"/>
+            </a:solidFill>
+            <a:tailEnd type="triangle"/>
+          </a:ln>
+        </p:spPr>
+        <p:style>
+          <a:lnRef idx="1">
+            <a:schemeClr val="accent1"/>
+          </a:lnRef>
+          <a:fillRef idx="0">
+            <a:schemeClr val="accent1"/>
+          </a:fillRef>
+          <a:effectRef idx="0">
+            <a:schemeClr val="accent1"/>
+          </a:effectRef>
+          <a:fontRef idx="minor">
+            <a:schemeClr val="tx1"/>
+          </a:fontRef>
+        </p:style>
+      </p:cxnSp>
+      <p:sp>
+        <p:nvSpPr>
+          <p:cNvPr id="123" name="순서도: 처리 122">
+            <a:extLst>
+              <a:ext uri="{FF2B5EF4-FFF2-40B4-BE49-F238E27FC236}">
+                <a16:creationId xmlns:a16="http://schemas.microsoft.com/office/drawing/2014/main" id="{076AAF2B-27B9-424E-BF74-3B8E3C2D2F87}"/>
+              </a:ext>
+            </a:extLst>
+          </p:cNvPr>
+          <p:cNvSpPr/>
+          <p:nvPr/>
+        </p:nvSpPr>
+        <p:spPr>
+          <a:xfrm>
+            <a:off x="6441526" y="5545195"/>
+            <a:ext cx="1309902" cy="387073"/>
+          </a:xfrm>
+          <a:prstGeom prst="flowChartProcess">
+            <a:avLst/>
+          </a:prstGeom>
+        </p:spPr>
+        <p:style>
+          <a:lnRef idx="2">
+            <a:schemeClr val="accent1">
+              <a:shade val="50000"/>
+            </a:schemeClr>
+          </a:lnRef>
+          <a:fillRef idx="1">
+            <a:schemeClr val="accent1"/>
+          </a:fillRef>
+          <a:effectRef idx="0">
+            <a:schemeClr val="accent1"/>
+          </a:effectRef>
+          <a:fontRef idx="minor">
+            <a:schemeClr val="lt1"/>
+          </a:fontRef>
+        </p:style>
+        <p:txBody>
+          <a:bodyPr rtlCol="0" anchor="ctr"/>
+          <a:lstStyle/>
+          <a:p>
+            <a:pPr algn="ctr"/>
+            <a:r>
+              <a:rPr lang="ko-KR" altLang="en-US" sz="1000" b="1"/>
+              <a:t>스키병</a:t>
+            </a:r>
+            <a:r>
+              <a:rPr lang="ko-KR" altLang="en-US" sz="1000" b="1" dirty="0"/>
+              <a:t> 규칙 적용</a:t>
+            </a:r>
+          </a:p>
+        </p:txBody>
+      </p:sp>
+      <p:cxnSp>
+        <p:nvCxnSpPr>
+          <p:cNvPr id="148" name="직선 화살표 연결선 147">
+            <a:extLst>
+              <a:ext uri="{FF2B5EF4-FFF2-40B4-BE49-F238E27FC236}">
+                <a16:creationId xmlns:a16="http://schemas.microsoft.com/office/drawing/2014/main" id="{49B6A833-40DD-4C59-9168-4427F1A37916}"/>
+              </a:ext>
+            </a:extLst>
+          </p:cNvPr>
+          <p:cNvCxnSpPr>
+            <a:stCxn id="15" idx="3"/>
+            <a:endCxn id="14" idx="1"/>
+          </p:cNvCxnSpPr>
+          <p:nvPr/>
+        </p:nvCxnSpPr>
+        <p:spPr>
+          <a:xfrm>
+            <a:off x="7518112" y="2499638"/>
+            <a:ext cx="947276" cy="1778019"/>
+          </a:xfrm>
+          <a:prstGeom prst="bentConnector3">
+            <a:avLst>
+              <a:gd name="adj1" fmla="val 57085"/>
+            </a:avLst>
+          </a:prstGeom>
+          <a:ln>
+            <a:solidFill>
+              <a:schemeClr val="tx1"/>
+            </a:solidFill>
+            <a:tailEnd type="triangle"/>
+          </a:ln>
+        </p:spPr>
+        <p:style>
+          <a:lnRef idx="1">
+            <a:schemeClr val="accent1"/>
+          </a:lnRef>
+          <a:fillRef idx="0">
+            <a:schemeClr val="accent1"/>
+          </a:fillRef>
+          <a:effectRef idx="0">
+            <a:schemeClr val="accent1"/>
+          </a:effectRef>
+          <a:fontRef idx="minor">
+            <a:schemeClr val="tx1"/>
+          </a:fontRef>
+        </p:style>
+      </p:cxnSp>
+      <p:cxnSp>
+        <p:nvCxnSpPr>
+          <p:cNvPr id="149" name="직선 화살표 연결선 147">
+            <a:extLst>
+              <a:ext uri="{FF2B5EF4-FFF2-40B4-BE49-F238E27FC236}">
+                <a16:creationId xmlns:a16="http://schemas.microsoft.com/office/drawing/2014/main" id="{F643565D-F865-4575-A943-854BE5E29BA6}"/>
+              </a:ext>
+            </a:extLst>
+          </p:cNvPr>
+          <p:cNvCxnSpPr>
+            <a:cxnSpLocks/>
+            <a:stCxn id="100" idx="3"/>
+          </p:cNvCxnSpPr>
+          <p:nvPr/>
+        </p:nvCxnSpPr>
+        <p:spPr>
+          <a:xfrm flipV="1">
+            <a:off x="7837148" y="3428999"/>
+            <a:ext cx="227214" cy="1"/>
+          </a:xfrm>
+          <a:prstGeom prst="straightConnector1">
+            <a:avLst/>
+          </a:prstGeom>
+          <a:ln>
+            <a:solidFill>
+              <a:schemeClr val="tx1"/>
+            </a:solidFill>
+            <a:tailEnd type="triangle"/>
+          </a:ln>
+        </p:spPr>
+        <p:style>
+          <a:lnRef idx="1">
+            <a:schemeClr val="accent1"/>
+          </a:lnRef>
+          <a:fillRef idx="0">
+            <a:schemeClr val="accent1"/>
+          </a:fillRef>
+          <a:effectRef idx="0">
+            <a:schemeClr val="accent1"/>
+          </a:effectRef>
+          <a:fontRef idx="minor">
+            <a:schemeClr val="tx1"/>
+          </a:fontRef>
+        </p:style>
+      </p:cxnSp>
+      <p:cxnSp>
+        <p:nvCxnSpPr>
+          <p:cNvPr id="156" name="연결선: 꺾임 155">
+            <a:extLst>
+              <a:ext uri="{FF2B5EF4-FFF2-40B4-BE49-F238E27FC236}">
+                <a16:creationId xmlns:a16="http://schemas.microsoft.com/office/drawing/2014/main" id="{A4D18405-D9CC-4FA7-96F7-39B50ABBD389}"/>
+              </a:ext>
+            </a:extLst>
+          </p:cNvPr>
+          <p:cNvCxnSpPr>
+            <a:stCxn id="10" idx="3"/>
+          </p:cNvCxnSpPr>
+          <p:nvPr/>
+        </p:nvCxnSpPr>
+        <p:spPr>
+          <a:xfrm flipV="1">
+            <a:off x="7518112" y="4078342"/>
+            <a:ext cx="546250" cy="2"/>
+          </a:xfrm>
+          <a:prstGeom prst="straightConnector1">
+            <a:avLst/>
+          </a:prstGeom>
+          <a:ln>
+            <a:solidFill>
+              <a:schemeClr val="tx1"/>
+            </a:solidFill>
+            <a:tailEnd type="triangle"/>
+          </a:ln>
+        </p:spPr>
+        <p:style>
+          <a:lnRef idx="1">
+            <a:schemeClr val="accent1"/>
+          </a:lnRef>
+          <a:fillRef idx="0">
+            <a:schemeClr val="accent1"/>
+          </a:fillRef>
+          <a:effectRef idx="0">
+            <a:schemeClr val="accent1"/>
+          </a:effectRef>
+          <a:fontRef idx="minor">
+            <a:schemeClr val="tx1"/>
+          </a:fontRef>
+        </p:style>
+      </p:cxnSp>
+      <p:cxnSp>
+        <p:nvCxnSpPr>
+          <p:cNvPr id="160" name="직선 화살표 연결선 159">
+            <a:extLst>
+              <a:ext uri="{FF2B5EF4-FFF2-40B4-BE49-F238E27FC236}">
+                <a16:creationId xmlns:a16="http://schemas.microsoft.com/office/drawing/2014/main" id="{EED8F372-067E-4783-8278-130CFA680835}"/>
+              </a:ext>
+            </a:extLst>
+          </p:cNvPr>
+          <p:cNvCxnSpPr>
+            <a:cxnSpLocks/>
+            <a:stCxn id="114" idx="3"/>
+          </p:cNvCxnSpPr>
+          <p:nvPr/>
+        </p:nvCxnSpPr>
+        <p:spPr>
+          <a:xfrm flipV="1">
+            <a:off x="7522440" y="4271877"/>
+            <a:ext cx="540128" cy="375236"/>
+          </a:xfrm>
+          <a:prstGeom prst="bentConnector3">
+            <a:avLst>
+              <a:gd name="adj1" fmla="val 50000"/>
+            </a:avLst>
+          </a:prstGeom>
+          <a:ln>
+            <a:solidFill>
+              <a:schemeClr val="tx1"/>
+            </a:solidFill>
+            <a:tailEnd type="triangle"/>
+          </a:ln>
+        </p:spPr>
+        <p:style>
+          <a:lnRef idx="1">
+            <a:schemeClr val="accent1"/>
+          </a:lnRef>
+          <a:fillRef idx="0">
+            <a:schemeClr val="accent1"/>
+          </a:fillRef>
+          <a:effectRef idx="0">
+            <a:schemeClr val="accent1"/>
+          </a:effectRef>
+          <a:fontRef idx="minor">
+            <a:schemeClr val="tx1"/>
+          </a:fontRef>
+        </p:style>
+      </p:cxnSp>
+      <p:cxnSp>
+        <p:nvCxnSpPr>
+          <p:cNvPr id="163" name="직선 화살표 연결선 159">
+            <a:extLst>
+              <a:ext uri="{FF2B5EF4-FFF2-40B4-BE49-F238E27FC236}">
+                <a16:creationId xmlns:a16="http://schemas.microsoft.com/office/drawing/2014/main" id="{73163F0F-A5B0-42C1-A361-EDEBB3182753}"/>
+              </a:ext>
+            </a:extLst>
+          </p:cNvPr>
+          <p:cNvCxnSpPr>
+            <a:cxnSpLocks/>
+            <a:stCxn id="118" idx="3"/>
+          </p:cNvCxnSpPr>
+          <p:nvPr/>
+        </p:nvCxnSpPr>
+        <p:spPr>
+          <a:xfrm flipV="1">
+            <a:off x="7522440" y="4271877"/>
+            <a:ext cx="606492" cy="925177"/>
+          </a:xfrm>
+          <a:prstGeom prst="bentConnector2">
+            <a:avLst/>
+          </a:prstGeom>
+          <a:ln>
+            <a:solidFill>
+              <a:schemeClr val="tx1"/>
+            </a:solidFill>
+            <a:tailEnd type="triangle"/>
+          </a:ln>
+        </p:spPr>
+        <p:style>
+          <a:lnRef idx="1">
+            <a:schemeClr val="accent1"/>
+          </a:lnRef>
+          <a:fillRef idx="0">
+            <a:schemeClr val="accent1"/>
+          </a:fillRef>
+          <a:effectRef idx="0">
+            <a:schemeClr val="accent1"/>
+          </a:effectRef>
+          <a:fontRef idx="minor">
+            <a:schemeClr val="tx1"/>
+          </a:fontRef>
+        </p:style>
+      </p:cxnSp>
+      <p:cxnSp>
+        <p:nvCxnSpPr>
+          <p:cNvPr id="166" name="직선 화살표 연결선 159">
+            <a:extLst>
+              <a:ext uri="{FF2B5EF4-FFF2-40B4-BE49-F238E27FC236}">
+                <a16:creationId xmlns:a16="http://schemas.microsoft.com/office/drawing/2014/main" id="{EE3CD4C0-296D-4CDA-B82C-0FFDC81EB260}"/>
+              </a:ext>
+            </a:extLst>
+          </p:cNvPr>
+          <p:cNvCxnSpPr>
+            <a:cxnSpLocks/>
+            <a:stCxn id="123" idx="3"/>
+          </p:cNvCxnSpPr>
+          <p:nvPr/>
+        </p:nvCxnSpPr>
+        <p:spPr>
+          <a:xfrm flipV="1">
+            <a:off x="7751428" y="5197053"/>
+            <a:ext cx="280780" cy="541679"/>
+          </a:xfrm>
+          <a:prstGeom prst="bentConnector2">
+            <a:avLst/>
+          </a:prstGeom>
+          <a:ln>
+            <a:solidFill>
+              <a:schemeClr val="tx1"/>
+            </a:solidFill>
+            <a:tailEnd type="triangle"/>
+          </a:ln>
+        </p:spPr>
+        <p:style>
+          <a:lnRef idx="1">
+            <a:schemeClr val="accent1"/>
+          </a:lnRef>
+          <a:fillRef idx="0">
+            <a:schemeClr val="accent1"/>
+          </a:fillRef>
+          <a:effectRef idx="0">
+            <a:schemeClr val="accent1"/>
+          </a:effectRef>
+          <a:fontRef idx="minor">
+            <a:schemeClr val="tx1"/>
+          </a:fontRef>
+        </p:style>
+      </p:cxnSp>
+      <p:cxnSp>
+        <p:nvCxnSpPr>
+          <p:cNvPr id="172" name="직선 화살표 연결선 171">
+            <a:extLst>
+              <a:ext uri="{FF2B5EF4-FFF2-40B4-BE49-F238E27FC236}">
+                <a16:creationId xmlns:a16="http://schemas.microsoft.com/office/drawing/2014/main" id="{8768ECA8-1F74-4651-B3AF-FE0504487A3B}"/>
+              </a:ext>
+            </a:extLst>
+          </p:cNvPr>
+          <p:cNvCxnSpPr>
+            <a:cxnSpLocks/>
+            <a:stCxn id="16" idx="2"/>
+            <a:endCxn id="18" idx="0"/>
+          </p:cNvCxnSpPr>
+          <p:nvPr/>
+        </p:nvCxnSpPr>
+        <p:spPr>
+          <a:xfrm>
+            <a:off x="10586804" y="4465414"/>
+            <a:ext cx="0" cy="246738"/>
+          </a:xfrm>
+          <a:prstGeom prst="straightConnector1">
+            <a:avLst/>
+          </a:prstGeom>
+          <a:ln>
+            <a:solidFill>
+              <a:schemeClr val="tx1"/>
+            </a:solidFill>
+            <a:tailEnd type="triangle"/>
+          </a:ln>
+        </p:spPr>
+        <p:style>
+          <a:lnRef idx="1">
+            <a:schemeClr val="accent1"/>
+          </a:lnRef>
+          <a:fillRef idx="0">
+            <a:schemeClr val="accent1"/>
+          </a:fillRef>
+          <a:effectRef idx="0">
+            <a:schemeClr val="accent1"/>
+          </a:effectRef>
+          <a:fontRef idx="minor">
+            <a:schemeClr val="tx1"/>
+          </a:fontRef>
+        </p:style>
+      </p:cxnSp>
+      <p:sp>
+        <p:nvSpPr>
+          <p:cNvPr id="182" name="순서도: 수행의 시작/종료 181">
+            <a:extLst>
+              <a:ext uri="{FF2B5EF4-FFF2-40B4-BE49-F238E27FC236}">
+                <a16:creationId xmlns:a16="http://schemas.microsoft.com/office/drawing/2014/main" id="{79AF6451-5D6F-4D7A-BD0B-B912FEC38C82}"/>
+              </a:ext>
+            </a:extLst>
+          </p:cNvPr>
+          <p:cNvSpPr/>
+          <p:nvPr/>
+        </p:nvSpPr>
+        <p:spPr>
+          <a:xfrm>
+            <a:off x="10112825" y="6490757"/>
+            <a:ext cx="947956" cy="335560"/>
+          </a:xfrm>
+          <a:prstGeom prst="flowChartTerminator">
+            <a:avLst/>
+          </a:prstGeom>
+        </p:spPr>
+        <p:style>
+          <a:lnRef idx="2">
+            <a:schemeClr val="accent1">
+              <a:shade val="50000"/>
+            </a:schemeClr>
+          </a:lnRef>
+          <a:fillRef idx="1">
+            <a:schemeClr val="accent1"/>
+          </a:fillRef>
+          <a:effectRef idx="0">
+            <a:schemeClr val="accent1"/>
+          </a:effectRef>
+          <a:fontRef idx="minor">
+            <a:schemeClr val="lt1"/>
+          </a:fontRef>
+        </p:style>
+        <p:txBody>
+          <a:bodyPr rtlCol="0" anchor="ctr"/>
+          <a:lstStyle/>
+          <a:p>
+            <a:pPr algn="ctr"/>
+            <a:r>
+              <a:rPr lang="ko-KR" altLang="en-US" sz="1000" b="1" dirty="0"/>
+              <a:t>끝</a:t>
+            </a:r>
+          </a:p>
+        </p:txBody>
+      </p:sp>
+      <p:cxnSp>
+        <p:nvCxnSpPr>
+          <p:cNvPr id="183" name="직선 화살표 연결선 182">
+            <a:extLst>
+              <a:ext uri="{FF2B5EF4-FFF2-40B4-BE49-F238E27FC236}">
+                <a16:creationId xmlns:a16="http://schemas.microsoft.com/office/drawing/2014/main" id="{C1F66453-CFA1-4809-90B5-8EC4403FD6AB}"/>
+              </a:ext>
+            </a:extLst>
+          </p:cNvPr>
+          <p:cNvCxnSpPr>
+            <a:cxnSpLocks/>
+            <a:stCxn id="17" idx="2"/>
+            <a:endCxn id="182" idx="0"/>
+          </p:cNvCxnSpPr>
+          <p:nvPr/>
+        </p:nvCxnSpPr>
+        <p:spPr>
+          <a:xfrm flipH="1">
+            <a:off x="10586803" y="6036469"/>
+            <a:ext cx="1" cy="454288"/>
+          </a:xfrm>
+          <a:prstGeom prst="straightConnector1">
+            <a:avLst/>
+          </a:prstGeom>
+          <a:ln>
+            <a:solidFill>
+              <a:schemeClr val="tx1"/>
+            </a:solidFill>
+            <a:tailEnd type="triangle"/>
+          </a:ln>
+        </p:spPr>
+        <p:style>
+          <a:lnRef idx="1">
+            <a:schemeClr val="accent1"/>
+          </a:lnRef>
+          <a:fillRef idx="0">
+            <a:schemeClr val="accent1"/>
+          </a:fillRef>
+          <a:effectRef idx="0">
+            <a:schemeClr val="accent1"/>
+          </a:effectRef>
+          <a:fontRef idx="minor">
+            <a:schemeClr val="tx1"/>
+          </a:fontRef>
+        </p:style>
+      </p:cxnSp>
+      <p:sp>
+        <p:nvSpPr>
+          <p:cNvPr id="190" name="TextBox 189">
+            <a:extLst>
+              <a:ext uri="{FF2B5EF4-FFF2-40B4-BE49-F238E27FC236}">
+                <a16:creationId xmlns:a16="http://schemas.microsoft.com/office/drawing/2014/main" id="{F906A014-6D99-4C00-A637-2D845E1978C3}"/>
+              </a:ext>
+            </a:extLst>
+          </p:cNvPr>
+          <p:cNvSpPr txBox="1"/>
+          <p:nvPr/>
+        </p:nvSpPr>
+        <p:spPr>
+          <a:xfrm>
+            <a:off x="3800213" y="1573526"/>
+            <a:ext cx="117446" cy="246221"/>
+          </a:xfrm>
+          <a:prstGeom prst="rect">
+            <a:avLst/>
+          </a:prstGeom>
+          <a:noFill/>
+        </p:spPr>
+        <p:txBody>
+          <a:bodyPr wrap="square" rtlCol="0">
+            <a:spAutoFit/>
+          </a:bodyPr>
+          <a:lstStyle/>
+          <a:p>
+            <a:r>
+              <a:rPr lang="en-US" altLang="ko-KR" sz="1000" b="1" dirty="0">
+                <a:solidFill>
+                  <a:schemeClr val="accent1"/>
+                </a:solidFill>
+              </a:rPr>
+              <a:t>Y</a:t>
+            </a:r>
+            <a:endParaRPr lang="ko-KR" altLang="en-US" sz="1000" b="1" dirty="0">
+              <a:solidFill>
+                <a:schemeClr val="accent1"/>
+              </a:solidFill>
+            </a:endParaRPr>
+          </a:p>
+        </p:txBody>
+      </p:sp>
+      <p:sp>
+        <p:nvSpPr>
+          <p:cNvPr id="191" name="TextBox 190">
+            <a:extLst>
+              <a:ext uri="{FF2B5EF4-FFF2-40B4-BE49-F238E27FC236}">
+                <a16:creationId xmlns:a16="http://schemas.microsoft.com/office/drawing/2014/main" id="{8DF558ED-7577-4CDF-8EA4-AC079B5859AF}"/>
+              </a:ext>
+            </a:extLst>
+          </p:cNvPr>
+          <p:cNvSpPr txBox="1"/>
+          <p:nvPr/>
+        </p:nvSpPr>
+        <p:spPr>
+          <a:xfrm>
+            <a:off x="5924636" y="2260262"/>
+            <a:ext cx="117446" cy="246221"/>
+          </a:xfrm>
+          <a:prstGeom prst="rect">
+            <a:avLst/>
+          </a:prstGeom>
+          <a:noFill/>
+        </p:spPr>
+        <p:txBody>
+          <a:bodyPr wrap="square" rtlCol="0">
+            <a:spAutoFit/>
+          </a:bodyPr>
+          <a:lstStyle/>
+          <a:p>
+            <a:r>
+              <a:rPr lang="en-US" altLang="ko-KR" sz="1000" b="1" dirty="0">
+                <a:solidFill>
+                  <a:schemeClr val="accent1"/>
+                </a:solidFill>
+              </a:rPr>
+              <a:t>Y</a:t>
+            </a:r>
+            <a:endParaRPr lang="ko-KR" altLang="en-US" sz="1000" b="1" dirty="0">
+              <a:solidFill>
+                <a:schemeClr val="accent1"/>
+              </a:solidFill>
+            </a:endParaRPr>
+          </a:p>
+        </p:txBody>
+      </p:sp>
+      <p:sp>
+        <p:nvSpPr>
+          <p:cNvPr id="192" name="TextBox 191">
+            <a:extLst>
+              <a:ext uri="{FF2B5EF4-FFF2-40B4-BE49-F238E27FC236}">
+                <a16:creationId xmlns:a16="http://schemas.microsoft.com/office/drawing/2014/main" id="{DD405813-66DE-4A24-A990-5D17478BA4A0}"/>
+              </a:ext>
+            </a:extLst>
+          </p:cNvPr>
+          <p:cNvSpPr txBox="1"/>
+          <p:nvPr/>
+        </p:nvSpPr>
+        <p:spPr>
+          <a:xfrm>
+            <a:off x="6152805" y="3222753"/>
+            <a:ext cx="117446" cy="246221"/>
+          </a:xfrm>
+          <a:prstGeom prst="rect">
+            <a:avLst/>
+          </a:prstGeom>
+          <a:noFill/>
+        </p:spPr>
+        <p:txBody>
+          <a:bodyPr wrap="square" rtlCol="0">
+            <a:spAutoFit/>
+          </a:bodyPr>
+          <a:lstStyle/>
+          <a:p>
+            <a:r>
+              <a:rPr lang="en-US" altLang="ko-KR" sz="1000" b="1" dirty="0">
+                <a:solidFill>
+                  <a:schemeClr val="accent1"/>
+                </a:solidFill>
+              </a:rPr>
+              <a:t>Y</a:t>
+            </a:r>
+            <a:endParaRPr lang="ko-KR" altLang="en-US" sz="1000" b="1" dirty="0">
+              <a:solidFill>
+                <a:schemeClr val="accent1"/>
+              </a:solidFill>
+            </a:endParaRPr>
+          </a:p>
+        </p:txBody>
+      </p:sp>
+      <p:sp>
+        <p:nvSpPr>
+          <p:cNvPr id="193" name="TextBox 192">
+            <a:extLst>
+              <a:ext uri="{FF2B5EF4-FFF2-40B4-BE49-F238E27FC236}">
+                <a16:creationId xmlns:a16="http://schemas.microsoft.com/office/drawing/2014/main" id="{E5E046FC-17A8-41DA-B4E0-44DEFF60A31D}"/>
+              </a:ext>
+            </a:extLst>
+          </p:cNvPr>
+          <p:cNvSpPr txBox="1"/>
+          <p:nvPr/>
+        </p:nvSpPr>
+        <p:spPr>
+          <a:xfrm>
+            <a:off x="5909931" y="2796483"/>
+            <a:ext cx="193981" cy="246221"/>
+          </a:xfrm>
+          <a:prstGeom prst="rect">
+            <a:avLst/>
+          </a:prstGeom>
+          <a:noFill/>
+        </p:spPr>
+        <p:txBody>
+          <a:bodyPr wrap="square" rtlCol="0">
+            <a:spAutoFit/>
+          </a:bodyPr>
+          <a:lstStyle/>
+          <a:p>
+            <a:r>
+              <a:rPr lang="en-US" altLang="ko-KR" sz="1000" b="1" dirty="0">
+                <a:solidFill>
+                  <a:schemeClr val="accent1"/>
+                </a:solidFill>
+              </a:rPr>
+              <a:t>Y</a:t>
+            </a:r>
+            <a:endParaRPr lang="ko-KR" altLang="en-US" sz="1000" b="1" dirty="0">
+              <a:solidFill>
+                <a:schemeClr val="accent1"/>
+              </a:solidFill>
+            </a:endParaRPr>
+          </a:p>
+        </p:txBody>
+      </p:sp>
+      <p:sp>
+        <p:nvSpPr>
+          <p:cNvPr id="194" name="TextBox 193">
+            <a:extLst>
+              <a:ext uri="{FF2B5EF4-FFF2-40B4-BE49-F238E27FC236}">
+                <a16:creationId xmlns:a16="http://schemas.microsoft.com/office/drawing/2014/main" id="{C648EE82-2846-44B8-98BB-5AD8E9518E77}"/>
+              </a:ext>
+            </a:extLst>
+          </p:cNvPr>
+          <p:cNvSpPr txBox="1"/>
+          <p:nvPr/>
+        </p:nvSpPr>
+        <p:spPr>
+          <a:xfrm>
+            <a:off x="4738653" y="2818283"/>
+            <a:ext cx="142386" cy="246221"/>
+          </a:xfrm>
+          <a:prstGeom prst="rect">
+            <a:avLst/>
+          </a:prstGeom>
+          <a:noFill/>
+        </p:spPr>
+        <p:txBody>
+          <a:bodyPr wrap="square" rtlCol="0">
+            <a:spAutoFit/>
+          </a:bodyPr>
+          <a:lstStyle/>
+          <a:p>
+            <a:r>
+              <a:rPr lang="en-US" altLang="ko-KR" sz="1000" b="1" dirty="0">
+                <a:solidFill>
+                  <a:srgbClr val="FF0000"/>
+                </a:solidFill>
+              </a:rPr>
+              <a:t>N</a:t>
+            </a:r>
+            <a:endParaRPr lang="ko-KR" altLang="en-US" sz="1000" b="1" dirty="0">
+              <a:solidFill>
+                <a:srgbClr val="FF0000"/>
+              </a:solidFill>
+            </a:endParaRPr>
+          </a:p>
+        </p:txBody>
+      </p:sp>
+      <p:sp>
+        <p:nvSpPr>
+          <p:cNvPr id="196" name="TextBox 195">
+            <a:extLst>
+              <a:ext uri="{FF2B5EF4-FFF2-40B4-BE49-F238E27FC236}">
+                <a16:creationId xmlns:a16="http://schemas.microsoft.com/office/drawing/2014/main" id="{992314C0-204C-42A5-BEC9-EAFBAEE961B6}"/>
+              </a:ext>
+            </a:extLst>
+          </p:cNvPr>
+          <p:cNvSpPr txBox="1"/>
+          <p:nvPr/>
+        </p:nvSpPr>
+        <p:spPr>
+          <a:xfrm>
+            <a:off x="5666547" y="3832234"/>
+            <a:ext cx="142386" cy="246221"/>
+          </a:xfrm>
+          <a:prstGeom prst="rect">
+            <a:avLst/>
+          </a:prstGeom>
+          <a:noFill/>
+        </p:spPr>
+        <p:txBody>
+          <a:bodyPr wrap="square" rtlCol="0">
+            <a:spAutoFit/>
+          </a:bodyPr>
+          <a:lstStyle/>
+          <a:p>
+            <a:r>
+              <a:rPr lang="en-US" altLang="ko-KR" sz="1000" b="1" dirty="0">
+                <a:solidFill>
+                  <a:srgbClr val="FF0000"/>
+                </a:solidFill>
+              </a:rPr>
+              <a:t>N</a:t>
+            </a:r>
+            <a:endParaRPr lang="ko-KR" altLang="en-US" sz="1000" b="1" dirty="0">
+              <a:solidFill>
+                <a:srgbClr val="FF0000"/>
+              </a:solidFill>
+            </a:endParaRPr>
+          </a:p>
+        </p:txBody>
+      </p:sp>
+      <p:sp>
+        <p:nvSpPr>
+          <p:cNvPr id="197" name="TextBox 196">
+            <a:extLst>
+              <a:ext uri="{FF2B5EF4-FFF2-40B4-BE49-F238E27FC236}">
+                <a16:creationId xmlns:a16="http://schemas.microsoft.com/office/drawing/2014/main" id="{103BC697-CF8B-4F56-96D6-230DBEA0ECC9}"/>
+              </a:ext>
+            </a:extLst>
+          </p:cNvPr>
+          <p:cNvSpPr txBox="1"/>
+          <p:nvPr/>
+        </p:nvSpPr>
+        <p:spPr>
+          <a:xfrm>
+            <a:off x="5666547" y="4421330"/>
+            <a:ext cx="142386" cy="246221"/>
+          </a:xfrm>
+          <a:prstGeom prst="rect">
+            <a:avLst/>
+          </a:prstGeom>
+          <a:noFill/>
+        </p:spPr>
+        <p:txBody>
+          <a:bodyPr wrap="square" rtlCol="0">
+            <a:spAutoFit/>
+          </a:bodyPr>
+          <a:lstStyle/>
+          <a:p>
+            <a:r>
+              <a:rPr lang="en-US" altLang="ko-KR" sz="1000" b="1" dirty="0">
+                <a:solidFill>
+                  <a:srgbClr val="FF0000"/>
+                </a:solidFill>
+              </a:rPr>
+              <a:t>N</a:t>
+            </a:r>
+            <a:endParaRPr lang="ko-KR" altLang="en-US" sz="1000" b="1" dirty="0">
+              <a:solidFill>
+                <a:srgbClr val="FF0000"/>
+              </a:solidFill>
+            </a:endParaRPr>
+          </a:p>
+        </p:txBody>
+      </p:sp>
+      <p:sp>
+        <p:nvSpPr>
+          <p:cNvPr id="198" name="TextBox 197">
+            <a:extLst>
+              <a:ext uri="{FF2B5EF4-FFF2-40B4-BE49-F238E27FC236}">
+                <a16:creationId xmlns:a16="http://schemas.microsoft.com/office/drawing/2014/main" id="{6F49A79E-BE0B-46A4-9A41-1DA061909F6B}"/>
+              </a:ext>
+            </a:extLst>
+          </p:cNvPr>
+          <p:cNvSpPr txBox="1"/>
+          <p:nvPr/>
+        </p:nvSpPr>
+        <p:spPr>
+          <a:xfrm>
+            <a:off x="5648518" y="4975719"/>
+            <a:ext cx="142386" cy="246221"/>
+          </a:xfrm>
+          <a:prstGeom prst="rect">
+            <a:avLst/>
+          </a:prstGeom>
+          <a:noFill/>
+        </p:spPr>
+        <p:txBody>
+          <a:bodyPr wrap="square" rtlCol="0">
+            <a:spAutoFit/>
+          </a:bodyPr>
+          <a:lstStyle/>
+          <a:p>
+            <a:r>
+              <a:rPr lang="en-US" altLang="ko-KR" sz="1000" b="1" dirty="0">
+                <a:solidFill>
+                  <a:srgbClr val="FF0000"/>
+                </a:solidFill>
+              </a:rPr>
+              <a:t>N</a:t>
+            </a:r>
+            <a:endParaRPr lang="ko-KR" altLang="en-US" sz="1000" b="1" dirty="0">
+              <a:solidFill>
+                <a:srgbClr val="FF0000"/>
+              </a:solidFill>
+            </a:endParaRPr>
+          </a:p>
+        </p:txBody>
+      </p:sp>
+      <p:sp>
+        <p:nvSpPr>
+          <p:cNvPr id="199" name="TextBox 198">
+            <a:extLst>
+              <a:ext uri="{FF2B5EF4-FFF2-40B4-BE49-F238E27FC236}">
+                <a16:creationId xmlns:a16="http://schemas.microsoft.com/office/drawing/2014/main" id="{4E79A93E-6DE9-4031-865D-3459F93E7CB1}"/>
+              </a:ext>
+            </a:extLst>
+          </p:cNvPr>
+          <p:cNvSpPr txBox="1"/>
+          <p:nvPr/>
+        </p:nvSpPr>
+        <p:spPr>
+          <a:xfrm>
+            <a:off x="5666547" y="5539929"/>
+            <a:ext cx="142386" cy="246221"/>
+          </a:xfrm>
+          <a:prstGeom prst="rect">
+            <a:avLst/>
+          </a:prstGeom>
+          <a:noFill/>
+        </p:spPr>
+        <p:txBody>
+          <a:bodyPr wrap="square" rtlCol="0">
+            <a:spAutoFit/>
+          </a:bodyPr>
+          <a:lstStyle/>
+          <a:p>
+            <a:r>
+              <a:rPr lang="en-US" altLang="ko-KR" sz="1000" b="1" dirty="0">
+                <a:solidFill>
+                  <a:srgbClr val="FF0000"/>
+                </a:solidFill>
+              </a:rPr>
+              <a:t>N</a:t>
+            </a:r>
+            <a:endParaRPr lang="ko-KR" altLang="en-US" sz="1000" b="1" dirty="0">
+              <a:solidFill>
+                <a:srgbClr val="FF0000"/>
+              </a:solidFill>
+            </a:endParaRPr>
+          </a:p>
+        </p:txBody>
+      </p:sp>
+      <p:sp>
+        <p:nvSpPr>
+          <p:cNvPr id="200" name="TextBox 199">
+            <a:extLst>
+              <a:ext uri="{FF2B5EF4-FFF2-40B4-BE49-F238E27FC236}">
+                <a16:creationId xmlns:a16="http://schemas.microsoft.com/office/drawing/2014/main" id="{098D4B4D-A42B-4C9E-AF03-3F04B7D70705}"/>
+              </a:ext>
+            </a:extLst>
+          </p:cNvPr>
+          <p:cNvSpPr txBox="1"/>
+          <p:nvPr/>
+        </p:nvSpPr>
+        <p:spPr>
+          <a:xfrm>
+            <a:off x="9293500" y="4819335"/>
+            <a:ext cx="142386" cy="246221"/>
+          </a:xfrm>
+          <a:prstGeom prst="rect">
+            <a:avLst/>
+          </a:prstGeom>
+          <a:noFill/>
+        </p:spPr>
+        <p:txBody>
+          <a:bodyPr wrap="square" rtlCol="0">
+            <a:spAutoFit/>
+          </a:bodyPr>
+          <a:lstStyle/>
+          <a:p>
+            <a:r>
+              <a:rPr lang="en-US" altLang="ko-KR" sz="1000" b="1" dirty="0">
+                <a:solidFill>
+                  <a:srgbClr val="FF0000"/>
+                </a:solidFill>
+              </a:rPr>
+              <a:t>N</a:t>
+            </a:r>
+            <a:endParaRPr lang="ko-KR" altLang="en-US" sz="1000" b="1" dirty="0">
+              <a:solidFill>
+                <a:srgbClr val="FF0000"/>
+              </a:solidFill>
+            </a:endParaRPr>
+          </a:p>
+        </p:txBody>
+      </p:sp>
+      <p:sp>
+        <p:nvSpPr>
+          <p:cNvPr id="201" name="TextBox 200">
+            <a:extLst>
+              <a:ext uri="{FF2B5EF4-FFF2-40B4-BE49-F238E27FC236}">
+                <a16:creationId xmlns:a16="http://schemas.microsoft.com/office/drawing/2014/main" id="{230105FC-4F0E-42DC-B116-9BAA81646DDD}"/>
+              </a:ext>
+            </a:extLst>
+          </p:cNvPr>
+          <p:cNvSpPr txBox="1"/>
+          <p:nvPr/>
+        </p:nvSpPr>
+        <p:spPr>
+          <a:xfrm>
+            <a:off x="1601941" y="3681522"/>
+            <a:ext cx="142386" cy="246221"/>
+          </a:xfrm>
+          <a:prstGeom prst="rect">
+            <a:avLst/>
+          </a:prstGeom>
+          <a:noFill/>
+        </p:spPr>
+        <p:txBody>
+          <a:bodyPr wrap="square" rtlCol="0">
+            <a:spAutoFit/>
+          </a:bodyPr>
+          <a:lstStyle/>
+          <a:p>
+            <a:r>
+              <a:rPr lang="en-US" altLang="ko-KR" sz="1000" b="1" dirty="0">
+                <a:solidFill>
+                  <a:srgbClr val="FF0000"/>
+                </a:solidFill>
+              </a:rPr>
+              <a:t>N</a:t>
+            </a:r>
+            <a:endParaRPr lang="ko-KR" altLang="en-US" sz="1000" b="1" dirty="0">
+              <a:solidFill>
+                <a:srgbClr val="FF0000"/>
+              </a:solidFill>
+            </a:endParaRPr>
+          </a:p>
+        </p:txBody>
+      </p:sp>
+    </p:spTree>
+    <p:extLst>
+      <p:ext uri="{BB962C8B-B14F-4D97-AF65-F5344CB8AC3E}">
+        <p14:creationId xmlns:p14="http://schemas.microsoft.com/office/powerpoint/2010/main" val="3139367081"/>
+      </p:ext>
+    </p:extLst>
+  </p:cSld>
+  <p:clrMapOvr>
+    <a:masterClrMapping/>
+  </p:clrMapOvr>
+</p:sld>
+</file>
+
 <file path=ppt/theme/theme1.xml><?xml version="1.0" encoding="utf-8"?>
 <a:theme xmlns:a="http://schemas.openxmlformats.org/drawingml/2006/main" name="Office 테마">
   <a:themeElements>

--- a/game-design/sbs-game-academy/SRPG 이동력 시스템 관련 캐릭터 및 지형 상상기획.pptx
+++ b/game-design/sbs-game-academy/SRPG 이동력 시스템 관련 캐릭터 및 지형 상상기획.pptx
@@ -107,6 +107,11 @@
       </a:defRPr>
     </a:lvl9pPr>
   </p:defaultTextStyle>
+  <p:extLst>
+    <p:ext uri="{EFAFB233-063F-42B5-8137-9DF3F51BA10A}">
+      <p15:sldGuideLst xmlns:p15="http://schemas.microsoft.com/office/powerpoint/2012/main"/>
+    </p:ext>
+  </p:extLst>
 </p:presentation>
 </file>
 
@@ -257,7 +262,7 @@
           <a:p>
             <a:fld id="{12BDE2EE-1829-4C1E-A92D-BCD1B3AE743A}" type="datetimeFigureOut">
               <a:rPr lang="ko-KR" altLang="en-US" smtClean="0"/>
-              <a:t>2026-05-22</a:t>
+              <a:t>2026-05-26</a:t>
             </a:fld>
             <a:endParaRPr lang="ko-KR" altLang="en-US"/>
           </a:p>
@@ -455,7 +460,7 @@
           <a:p>
             <a:fld id="{12BDE2EE-1829-4C1E-A92D-BCD1B3AE743A}" type="datetimeFigureOut">
               <a:rPr lang="ko-KR" altLang="en-US" smtClean="0"/>
-              <a:t>2026-05-22</a:t>
+              <a:t>2026-05-26</a:t>
             </a:fld>
             <a:endParaRPr lang="ko-KR" altLang="en-US"/>
           </a:p>
@@ -663,7 +668,7 @@
           <a:p>
             <a:fld id="{12BDE2EE-1829-4C1E-A92D-BCD1B3AE743A}" type="datetimeFigureOut">
               <a:rPr lang="ko-KR" altLang="en-US" smtClean="0"/>
-              <a:t>2026-05-22</a:t>
+              <a:t>2026-05-26</a:t>
             </a:fld>
             <a:endParaRPr lang="ko-KR" altLang="en-US"/>
           </a:p>
@@ -861,7 +866,7 @@
           <a:p>
             <a:fld id="{12BDE2EE-1829-4C1E-A92D-BCD1B3AE743A}" type="datetimeFigureOut">
               <a:rPr lang="ko-KR" altLang="en-US" smtClean="0"/>
-              <a:t>2026-05-22</a:t>
+              <a:t>2026-05-26</a:t>
             </a:fld>
             <a:endParaRPr lang="ko-KR" altLang="en-US"/>
           </a:p>
@@ -1136,7 +1141,7 @@
           <a:p>
             <a:fld id="{12BDE2EE-1829-4C1E-A92D-BCD1B3AE743A}" type="datetimeFigureOut">
               <a:rPr lang="ko-KR" altLang="en-US" smtClean="0"/>
-              <a:t>2026-05-22</a:t>
+              <a:t>2026-05-26</a:t>
             </a:fld>
             <a:endParaRPr lang="ko-KR" altLang="en-US"/>
           </a:p>
@@ -1401,7 +1406,7 @@
           <a:p>
             <a:fld id="{12BDE2EE-1829-4C1E-A92D-BCD1B3AE743A}" type="datetimeFigureOut">
               <a:rPr lang="ko-KR" altLang="en-US" smtClean="0"/>
-              <a:t>2026-05-22</a:t>
+              <a:t>2026-05-26</a:t>
             </a:fld>
             <a:endParaRPr lang="ko-KR" altLang="en-US"/>
           </a:p>
@@ -1813,7 +1818,7 @@
           <a:p>
             <a:fld id="{12BDE2EE-1829-4C1E-A92D-BCD1B3AE743A}" type="datetimeFigureOut">
               <a:rPr lang="ko-KR" altLang="en-US" smtClean="0"/>
-              <a:t>2026-05-22</a:t>
+              <a:t>2026-05-26</a:t>
             </a:fld>
             <a:endParaRPr lang="ko-KR" altLang="en-US"/>
           </a:p>
@@ -1954,7 +1959,7 @@
           <a:p>
             <a:fld id="{12BDE2EE-1829-4C1E-A92D-BCD1B3AE743A}" type="datetimeFigureOut">
               <a:rPr lang="ko-KR" altLang="en-US" smtClean="0"/>
-              <a:t>2026-05-22</a:t>
+              <a:t>2026-05-26</a:t>
             </a:fld>
             <a:endParaRPr lang="ko-KR" altLang="en-US"/>
           </a:p>
@@ -2067,7 +2072,7 @@
           <a:p>
             <a:fld id="{12BDE2EE-1829-4C1E-A92D-BCD1B3AE743A}" type="datetimeFigureOut">
               <a:rPr lang="ko-KR" altLang="en-US" smtClean="0"/>
-              <a:t>2026-05-22</a:t>
+              <a:t>2026-05-26</a:t>
             </a:fld>
             <a:endParaRPr lang="ko-KR" altLang="en-US"/>
           </a:p>
@@ -2378,7 +2383,7 @@
           <a:p>
             <a:fld id="{12BDE2EE-1829-4C1E-A92D-BCD1B3AE743A}" type="datetimeFigureOut">
               <a:rPr lang="ko-KR" altLang="en-US" smtClean="0"/>
-              <a:t>2026-05-22</a:t>
+              <a:t>2026-05-26</a:t>
             </a:fld>
             <a:endParaRPr lang="ko-KR" altLang="en-US"/>
           </a:p>
@@ -2666,7 +2671,7 @@
           <a:p>
             <a:fld id="{12BDE2EE-1829-4C1E-A92D-BCD1B3AE743A}" type="datetimeFigureOut">
               <a:rPr lang="ko-KR" altLang="en-US" smtClean="0"/>
-              <a:t>2026-05-22</a:t>
+              <a:t>2026-05-26</a:t>
             </a:fld>
             <a:endParaRPr lang="ko-KR" altLang="en-US"/>
           </a:p>
@@ -2907,7 +2912,7 @@
           <a:p>
             <a:fld id="{12BDE2EE-1829-4C1E-A92D-BCD1B3AE743A}" type="datetimeFigureOut">
               <a:rPr lang="ko-KR" altLang="en-US" smtClean="0"/>
-              <a:t>2026-05-22</a:t>
+              <a:t>2026-05-26</a:t>
             </a:fld>
             <a:endParaRPr lang="ko-KR" altLang="en-US"/>
           </a:p>
@@ -3402,8 +3407,8 @@
         </p:nvSpPr>
         <p:spPr>
           <a:xfrm>
-            <a:off x="562210" y="1686187"/>
-            <a:ext cx="8976073" cy="1754326"/>
+            <a:off x="562210" y="1247605"/>
+            <a:ext cx="8976073" cy="2585323"/>
           </a:xfrm>
           <a:prstGeom prst="rect">
             <a:avLst/>
@@ -3504,7 +3509,207 @@
               <a:buFontTx/>
               <a:buChar char="-"/>
             </a:pPr>
-            <a:endParaRPr lang="ko-KR" altLang="en-US" dirty="0"/>
+            <a:endParaRPr lang="en-US" altLang="ko-KR" dirty="0"/>
+          </a:p>
+          <a:p>
+            <a:pPr marL="285750" indent="-285750">
+              <a:buFontTx/>
+              <a:buChar char="-"/>
+            </a:pPr>
+            <a:r>
+              <a:rPr lang="ko-KR" altLang="en-US" dirty="0">
+                <a:solidFill>
+                  <a:srgbClr val="00B050"/>
+                </a:solidFill>
+              </a:rPr>
+              <a:t>지형효과 </a:t>
+            </a:r>
+            <a:r>
+              <a:rPr lang="en-US" altLang="ko-KR" dirty="0">
+                <a:solidFill>
+                  <a:srgbClr val="00B050"/>
+                </a:solidFill>
+              </a:rPr>
+              <a:t>: </a:t>
+            </a:r>
+            <a:r>
+              <a:rPr lang="ko-KR" altLang="en-US" dirty="0">
+                <a:solidFill>
+                  <a:srgbClr val="00B050"/>
+                </a:solidFill>
+              </a:rPr>
+              <a:t>설산에 특화되지 않는 병에게는 </a:t>
+            </a:r>
+            <a:r>
+              <a:rPr lang="ko-KR" altLang="en-US" dirty="0" err="1">
+                <a:solidFill>
+                  <a:srgbClr val="00B050"/>
+                </a:solidFill>
+              </a:rPr>
+              <a:t>회피율</a:t>
+            </a:r>
+            <a:r>
+              <a:rPr lang="ko-KR" altLang="en-US" dirty="0">
+                <a:solidFill>
+                  <a:srgbClr val="00B050"/>
+                </a:solidFill>
+              </a:rPr>
+              <a:t> </a:t>
+            </a:r>
+            <a:r>
+              <a:rPr lang="en-US" altLang="ko-KR" dirty="0">
+                <a:solidFill>
+                  <a:srgbClr val="00B050"/>
+                </a:solidFill>
+              </a:rPr>
+              <a:t>10% </a:t>
+            </a:r>
+            <a:r>
+              <a:rPr lang="ko-KR" altLang="en-US" dirty="0">
+                <a:solidFill>
+                  <a:srgbClr val="00B050"/>
+                </a:solidFill>
+              </a:rPr>
+              <a:t>하락</a:t>
+            </a:r>
+            <a:endParaRPr lang="en-US" altLang="ko-KR" dirty="0">
+              <a:solidFill>
+                <a:srgbClr val="00B050"/>
+              </a:solidFill>
+            </a:endParaRPr>
+          </a:p>
+          <a:p>
+            <a:pPr marL="285750" indent="-285750">
+              <a:buFontTx/>
+              <a:buChar char="-"/>
+            </a:pPr>
+            <a:r>
+              <a:rPr lang="ko-KR" altLang="en-US" dirty="0">
+                <a:solidFill>
+                  <a:srgbClr val="0070C0"/>
+                </a:solidFill>
+              </a:rPr>
+              <a:t>지형 적응력 </a:t>
+            </a:r>
+            <a:r>
+              <a:rPr lang="en-US" altLang="ko-KR" dirty="0">
+                <a:solidFill>
+                  <a:srgbClr val="0070C0"/>
+                </a:solidFill>
+              </a:rPr>
+              <a:t>:</a:t>
+            </a:r>
+            <a:r>
+              <a:rPr lang="ko-KR" altLang="en-US" dirty="0">
+                <a:solidFill>
+                  <a:srgbClr val="0070C0"/>
+                </a:solidFill>
+              </a:rPr>
+              <a:t> </a:t>
+            </a:r>
+            <a:r>
+              <a:rPr lang="ko-KR" altLang="en-US" dirty="0" err="1">
+                <a:solidFill>
+                  <a:srgbClr val="0070C0"/>
+                </a:solidFill>
+              </a:rPr>
+              <a:t>스키병</a:t>
+            </a:r>
+            <a:r>
+              <a:rPr lang="en-US" altLang="ko-KR" dirty="0">
+                <a:solidFill>
+                  <a:srgbClr val="0070C0"/>
+                </a:solidFill>
+              </a:rPr>
+              <a:t>/</a:t>
+            </a:r>
+            <a:r>
+              <a:rPr lang="ko-KR" altLang="en-US" dirty="0" err="1">
+                <a:solidFill>
+                  <a:srgbClr val="0070C0"/>
+                </a:solidFill>
+              </a:rPr>
+              <a:t>비병</a:t>
+            </a:r>
+            <a:r>
+              <a:rPr lang="ko-KR" altLang="en-US" dirty="0">
+                <a:solidFill>
+                  <a:srgbClr val="0070C0"/>
+                </a:solidFill>
+              </a:rPr>
+              <a:t> </a:t>
+            </a:r>
+            <a:r>
+              <a:rPr lang="en-US" altLang="ko-KR" dirty="0">
+                <a:solidFill>
+                  <a:srgbClr val="0070C0"/>
+                </a:solidFill>
+              </a:rPr>
+              <a:t>A</a:t>
+            </a:r>
+            <a:br>
+              <a:rPr lang="en-US" altLang="ko-KR" dirty="0">
+                <a:solidFill>
+                  <a:srgbClr val="0070C0"/>
+                </a:solidFill>
+              </a:rPr>
+            </a:br>
+            <a:r>
+              <a:rPr lang="en-US" altLang="ko-KR" dirty="0">
+                <a:solidFill>
+                  <a:srgbClr val="0070C0"/>
+                </a:solidFill>
+              </a:rPr>
+              <a:t>                  </a:t>
+            </a:r>
+            <a:r>
+              <a:rPr lang="ko-KR" altLang="en-US" dirty="0">
+                <a:solidFill>
+                  <a:srgbClr val="0070C0"/>
+                </a:solidFill>
+              </a:rPr>
+              <a:t>보병</a:t>
+            </a:r>
+            <a:r>
+              <a:rPr lang="en-US" altLang="ko-KR" dirty="0">
+                <a:solidFill>
+                  <a:srgbClr val="0070C0"/>
+                </a:solidFill>
+              </a:rPr>
+              <a:t>/</a:t>
+            </a:r>
+            <a:r>
+              <a:rPr lang="ko-KR" altLang="en-US" dirty="0">
+                <a:solidFill>
+                  <a:srgbClr val="0070C0"/>
+                </a:solidFill>
+              </a:rPr>
+              <a:t>기병</a:t>
+            </a:r>
+            <a:r>
+              <a:rPr lang="en-US" altLang="ko-KR" dirty="0">
+                <a:solidFill>
+                  <a:srgbClr val="0070C0"/>
+                </a:solidFill>
+              </a:rPr>
+              <a:t>/</a:t>
+            </a:r>
+            <a:r>
+              <a:rPr lang="ko-KR" altLang="en-US" dirty="0">
+                <a:solidFill>
+                  <a:srgbClr val="0070C0"/>
+                </a:solidFill>
+              </a:rPr>
+              <a:t>수병 </a:t>
+            </a:r>
+            <a:r>
+              <a:rPr lang="en-US" altLang="ko-KR" dirty="0">
+                <a:solidFill>
+                  <a:srgbClr val="0070C0"/>
+                </a:solidFill>
+              </a:rPr>
+              <a:t>C </a:t>
+            </a:r>
           </a:p>
         </p:txBody>
       </p:sp>
@@ -3522,8 +3727,8 @@
         </p:nvSpPr>
         <p:spPr>
           <a:xfrm>
-            <a:off x="562210" y="3361780"/>
-            <a:ext cx="8128784" cy="1200329"/>
+            <a:off x="562210" y="3832928"/>
+            <a:ext cx="8128784" cy="2585323"/>
           </a:xfrm>
           <a:prstGeom prst="rect">
             <a:avLst/>
@@ -3593,6 +3798,204 @@
             <a:r>
               <a:rPr lang="en-US" altLang="ko-KR" dirty="0"/>
               <a:t>.</a:t>
+            </a:r>
+          </a:p>
+          <a:p>
+            <a:pPr marL="285750" indent="-285750">
+              <a:buFontTx/>
+              <a:buChar char="-"/>
+            </a:pPr>
+            <a:endParaRPr lang="en-US" altLang="ko-KR" dirty="0"/>
+          </a:p>
+          <a:p>
+            <a:pPr marL="285750" indent="-285750">
+              <a:buFontTx/>
+              <a:buChar char="-"/>
+            </a:pPr>
+            <a:r>
+              <a:rPr lang="ko-KR" altLang="en-US" dirty="0">
+                <a:solidFill>
+                  <a:srgbClr val="00B050"/>
+                </a:solidFill>
+              </a:rPr>
+              <a:t>지형효과 </a:t>
+            </a:r>
+            <a:r>
+              <a:rPr lang="en-US" altLang="ko-KR" dirty="0">
+                <a:solidFill>
+                  <a:srgbClr val="00B050"/>
+                </a:solidFill>
+              </a:rPr>
+              <a:t>: </a:t>
+            </a:r>
+            <a:r>
+              <a:rPr lang="ko-KR" altLang="en-US" dirty="0">
+                <a:solidFill>
+                  <a:srgbClr val="00B050"/>
+                </a:solidFill>
+              </a:rPr>
+              <a:t>조사병단에게는 치명타 확률 </a:t>
+            </a:r>
+            <a:r>
+              <a:rPr lang="en-US" altLang="ko-KR" dirty="0">
+                <a:solidFill>
+                  <a:srgbClr val="00B050"/>
+                </a:solidFill>
+              </a:rPr>
+              <a:t>15% </a:t>
+            </a:r>
+            <a:r>
+              <a:rPr lang="ko-KR" altLang="en-US" dirty="0">
+                <a:solidFill>
+                  <a:srgbClr val="00B050"/>
+                </a:solidFill>
+              </a:rPr>
+              <a:t>상승</a:t>
+            </a:r>
+            <a:endParaRPr lang="en-US" altLang="ko-KR" dirty="0">
+              <a:solidFill>
+                <a:srgbClr val="00B050"/>
+              </a:solidFill>
+            </a:endParaRPr>
+          </a:p>
+          <a:p>
+            <a:pPr marL="285750" indent="-285750">
+              <a:buFontTx/>
+              <a:buChar char="-"/>
+            </a:pPr>
+            <a:r>
+              <a:rPr lang="ko-KR" altLang="en-US" dirty="0">
+                <a:solidFill>
+                  <a:srgbClr val="0070C0"/>
+                </a:solidFill>
+              </a:rPr>
+              <a:t>지형 적응력 </a:t>
+            </a:r>
+            <a:r>
+              <a:rPr lang="en-US" altLang="ko-KR" dirty="0">
+                <a:solidFill>
+                  <a:srgbClr val="0070C0"/>
+                </a:solidFill>
+              </a:rPr>
+              <a:t>:</a:t>
+            </a:r>
+            <a:r>
+              <a:rPr lang="ko-KR" altLang="en-US" dirty="0">
+                <a:solidFill>
+                  <a:srgbClr val="0070C0"/>
+                </a:solidFill>
+              </a:rPr>
+              <a:t> 조사병단 </a:t>
+            </a:r>
+            <a:r>
+              <a:rPr lang="en-US" altLang="ko-KR" dirty="0">
+                <a:solidFill>
+                  <a:srgbClr val="0070C0"/>
+                </a:solidFill>
+              </a:rPr>
+              <a:t>A</a:t>
+            </a:r>
+            <a:br>
+              <a:rPr lang="en-US" altLang="ko-KR" dirty="0">
+                <a:solidFill>
+                  <a:srgbClr val="0070C0"/>
+                </a:solidFill>
+              </a:rPr>
+            </a:br>
+            <a:r>
+              <a:rPr lang="en-US" altLang="ko-KR" dirty="0">
+                <a:solidFill>
+                  <a:srgbClr val="0070C0"/>
+                </a:solidFill>
+              </a:rPr>
+              <a:t>                  </a:t>
+            </a:r>
+            <a:r>
+              <a:rPr lang="ko-KR" altLang="en-US" dirty="0" err="1">
+                <a:solidFill>
+                  <a:srgbClr val="0070C0"/>
+                </a:solidFill>
+              </a:rPr>
+              <a:t>비병</a:t>
+            </a:r>
+            <a:r>
+              <a:rPr lang="ko-KR" altLang="en-US" dirty="0">
+                <a:solidFill>
+                  <a:srgbClr val="0070C0"/>
+                </a:solidFill>
+              </a:rPr>
+              <a:t> </a:t>
+            </a:r>
+            <a:r>
+              <a:rPr lang="en-US" altLang="ko-KR" dirty="0">
+                <a:solidFill>
+                  <a:srgbClr val="0070C0"/>
+                </a:solidFill>
+              </a:rPr>
+              <a:t>B</a:t>
+            </a:r>
+            <a:br>
+              <a:rPr lang="en-US" altLang="ko-KR" dirty="0">
+                <a:solidFill>
+                  <a:srgbClr val="0070C0"/>
+                </a:solidFill>
+              </a:rPr>
+            </a:br>
+            <a:r>
+              <a:rPr lang="en-US" altLang="ko-KR" dirty="0">
+                <a:solidFill>
+                  <a:srgbClr val="0070C0"/>
+                </a:solidFill>
+              </a:rPr>
+              <a:t>                  </a:t>
+            </a:r>
+            <a:r>
+              <a:rPr lang="ko-KR" altLang="en-US" dirty="0">
+                <a:solidFill>
+                  <a:srgbClr val="0070C0"/>
+                </a:solidFill>
+              </a:rPr>
+              <a:t>보병</a:t>
+            </a:r>
+            <a:r>
+              <a:rPr lang="en-US" altLang="ko-KR" dirty="0">
+                <a:solidFill>
+                  <a:srgbClr val="0070C0"/>
+                </a:solidFill>
+              </a:rPr>
+              <a:t>/</a:t>
+            </a:r>
+            <a:r>
+              <a:rPr lang="ko-KR" altLang="en-US" dirty="0">
+                <a:solidFill>
+                  <a:srgbClr val="0070C0"/>
+                </a:solidFill>
+              </a:rPr>
+              <a:t>기병</a:t>
+            </a:r>
+            <a:r>
+              <a:rPr lang="en-US" altLang="ko-KR" dirty="0">
+                <a:solidFill>
+                  <a:srgbClr val="0070C0"/>
+                </a:solidFill>
+              </a:rPr>
+              <a:t>/</a:t>
+            </a:r>
+            <a:r>
+              <a:rPr lang="ko-KR" altLang="en-US" dirty="0">
+                <a:solidFill>
+                  <a:srgbClr val="0070C0"/>
+                </a:solidFill>
+              </a:rPr>
+              <a:t>수병 </a:t>
+            </a:r>
+            <a:r>
+              <a:rPr lang="en-US" altLang="ko-KR" dirty="0">
+                <a:solidFill>
+                  <a:srgbClr val="0070C0"/>
+                </a:solidFill>
+              </a:rPr>
+              <a:t>C</a:t>
             </a:r>
           </a:p>
         </p:txBody>
@@ -3697,8 +4100,8 @@
         </p:nvSpPr>
         <p:spPr>
           <a:xfrm>
-            <a:off x="914399" y="1786855"/>
-            <a:ext cx="4446165" cy="1200329"/>
+            <a:off x="914399" y="1317072"/>
+            <a:ext cx="9538284" cy="2862322"/>
           </a:xfrm>
           <a:prstGeom prst="rect">
             <a:avLst/>
@@ -3749,10 +4152,10 @@
             <a:endParaRPr lang="en-US" altLang="ko-KR" dirty="0"/>
           </a:p>
           <a:p>
-            <a:r>
-              <a:rPr lang="en-US" altLang="ko-KR" dirty="0"/>
-              <a:t>- </a:t>
-            </a:r>
+            <a:pPr marL="285750" indent="-285750">
+              <a:buFontTx/>
+              <a:buChar char="-"/>
+            </a:pPr>
             <a:r>
               <a:rPr lang="ko-KR" altLang="en-US" dirty="0"/>
               <a:t>눈 지형에서 이동이 수월함</a:t>
@@ -3766,6 +4169,445 @@
             </a:pPr>
             <a:endParaRPr lang="en-US" altLang="ko-KR" dirty="0"/>
           </a:p>
+          <a:p>
+            <a:pPr marL="285750" indent="-285750">
+              <a:buFontTx/>
+              <a:buChar char="-"/>
+            </a:pPr>
+            <a:r>
+              <a:rPr lang="ko-KR" altLang="en-US" dirty="0">
+                <a:solidFill>
+                  <a:srgbClr val="002060"/>
+                </a:solidFill>
+              </a:rPr>
+              <a:t>사정거리 </a:t>
+            </a:r>
+            <a:r>
+              <a:rPr lang="en-US" altLang="ko-KR" dirty="0">
+                <a:solidFill>
+                  <a:srgbClr val="002060"/>
+                </a:solidFill>
+              </a:rPr>
+              <a:t>: 1</a:t>
+            </a:r>
+            <a:r>
+              <a:rPr lang="ko-KR" altLang="en-US" dirty="0">
+                <a:solidFill>
+                  <a:srgbClr val="002060"/>
+                </a:solidFill>
+              </a:rPr>
+              <a:t>칸 일반 근접병과 같은 사거리를 지니고 있음</a:t>
+            </a:r>
+            <a:r>
+              <a:rPr lang="en-US" altLang="ko-KR" dirty="0">
+                <a:solidFill>
+                  <a:srgbClr val="002060"/>
+                </a:solidFill>
+              </a:rPr>
+              <a:t>.</a:t>
+            </a:r>
+          </a:p>
+          <a:p>
+            <a:pPr marL="285750" indent="-285750">
+              <a:buFontTx/>
+              <a:buChar char="-"/>
+            </a:pPr>
+            <a:r>
+              <a:rPr lang="ko-KR" altLang="en-US" dirty="0">
+                <a:solidFill>
+                  <a:srgbClr val="002060"/>
+                </a:solidFill>
+              </a:rPr>
+              <a:t>상성 </a:t>
+            </a:r>
+            <a:r>
+              <a:rPr lang="en-US" altLang="ko-KR" dirty="0">
+                <a:solidFill>
+                  <a:srgbClr val="002060"/>
+                </a:solidFill>
+              </a:rPr>
+              <a:t>: ‘</a:t>
+            </a:r>
+            <a:r>
+              <a:rPr lang="ko-KR" altLang="en-US" dirty="0" err="1">
+                <a:solidFill>
+                  <a:srgbClr val="002060"/>
+                </a:solidFill>
+              </a:rPr>
+              <a:t>비병</a:t>
+            </a:r>
+            <a:r>
+              <a:rPr lang="en-US" altLang="ko-KR" dirty="0">
+                <a:solidFill>
+                  <a:srgbClr val="002060"/>
+                </a:solidFill>
+              </a:rPr>
+              <a:t>’</a:t>
+            </a:r>
+            <a:r>
+              <a:rPr lang="ko-KR" altLang="en-US" dirty="0">
+                <a:solidFill>
+                  <a:srgbClr val="002060"/>
+                </a:solidFill>
+              </a:rPr>
+              <a:t>에게 약하고</a:t>
+            </a:r>
+            <a:r>
+              <a:rPr lang="en-US" altLang="ko-KR" dirty="0">
+                <a:solidFill>
+                  <a:srgbClr val="002060"/>
+                </a:solidFill>
+              </a:rPr>
+              <a:t>, ‘</a:t>
+            </a:r>
+            <a:r>
+              <a:rPr lang="ko-KR" altLang="en-US" dirty="0">
+                <a:solidFill>
+                  <a:srgbClr val="002060"/>
+                </a:solidFill>
+              </a:rPr>
+              <a:t>수병</a:t>
+            </a:r>
+            <a:r>
+              <a:rPr lang="en-US" altLang="ko-KR" dirty="0">
+                <a:solidFill>
+                  <a:srgbClr val="002060"/>
+                </a:solidFill>
+              </a:rPr>
+              <a:t>’(</a:t>
+            </a:r>
+            <a:r>
+              <a:rPr lang="ko-KR" altLang="en-US" dirty="0">
+                <a:solidFill>
+                  <a:srgbClr val="002060"/>
+                </a:solidFill>
+              </a:rPr>
+              <a:t>물 지형 전투시</a:t>
+            </a:r>
+            <a:r>
+              <a:rPr lang="en-US" altLang="ko-KR" dirty="0">
+                <a:solidFill>
+                  <a:srgbClr val="002060"/>
+                </a:solidFill>
+              </a:rPr>
+              <a:t>)</a:t>
+            </a:r>
+            <a:r>
+              <a:rPr lang="ko-KR" altLang="en-US" dirty="0">
+                <a:solidFill>
+                  <a:srgbClr val="002060"/>
+                </a:solidFill>
+              </a:rPr>
+              <a:t>에게 약함</a:t>
+            </a:r>
+            <a:r>
+              <a:rPr lang="en-US" altLang="ko-KR" dirty="0">
+                <a:solidFill>
+                  <a:srgbClr val="002060"/>
+                </a:solidFill>
+              </a:rPr>
+              <a:t>.</a:t>
+            </a:r>
+            <a:br>
+              <a:rPr lang="en-US" altLang="ko-KR" dirty="0">
+                <a:solidFill>
+                  <a:srgbClr val="002060"/>
+                </a:solidFill>
+              </a:rPr>
+            </a:br>
+            <a:r>
+              <a:rPr lang="en-US" altLang="ko-KR" dirty="0">
+                <a:solidFill>
+                  <a:srgbClr val="002060"/>
+                </a:solidFill>
+              </a:rPr>
+              <a:t>        </a:t>
+            </a:r>
+            <a:r>
+              <a:rPr lang="ko-KR" altLang="en-US" u="sng" dirty="0">
+                <a:solidFill>
+                  <a:srgbClr val="002060"/>
+                </a:solidFill>
+              </a:rPr>
+              <a:t>지형 효과를 받지 못하면 </a:t>
+            </a:r>
+            <a:r>
+              <a:rPr lang="en-US" altLang="ko-KR" dirty="0">
+                <a:solidFill>
+                  <a:srgbClr val="002060"/>
+                </a:solidFill>
+              </a:rPr>
+              <a:t>‘</a:t>
+            </a:r>
+            <a:r>
+              <a:rPr lang="ko-KR" altLang="en-US" dirty="0">
+                <a:solidFill>
+                  <a:srgbClr val="002060"/>
+                </a:solidFill>
+              </a:rPr>
+              <a:t>기병</a:t>
+            </a:r>
+            <a:r>
+              <a:rPr lang="en-US" altLang="ko-KR" dirty="0">
+                <a:solidFill>
+                  <a:srgbClr val="002060"/>
+                </a:solidFill>
+              </a:rPr>
+              <a:t>’</a:t>
+            </a:r>
+            <a:r>
+              <a:rPr lang="ko-KR" altLang="en-US" dirty="0">
+                <a:solidFill>
+                  <a:srgbClr val="002060"/>
+                </a:solidFill>
+              </a:rPr>
+              <a:t>에게 약하고</a:t>
+            </a:r>
+            <a:br>
+              <a:rPr lang="en-US" altLang="ko-KR" dirty="0">
+                <a:solidFill>
+                  <a:srgbClr val="002060"/>
+                </a:solidFill>
+              </a:rPr>
+            </a:br>
+            <a:r>
+              <a:rPr lang="en-US" altLang="ko-KR" dirty="0">
+                <a:solidFill>
+                  <a:srgbClr val="002060"/>
+                </a:solidFill>
+              </a:rPr>
+              <a:t>        (</a:t>
+            </a:r>
+            <a:r>
+              <a:rPr lang="ko-KR" altLang="en-US" dirty="0">
+                <a:solidFill>
+                  <a:srgbClr val="002060"/>
+                </a:solidFill>
+              </a:rPr>
+              <a:t>지형효과를 받는다면</a:t>
+            </a:r>
+            <a:r>
+              <a:rPr lang="en-US" altLang="ko-KR" dirty="0">
+                <a:solidFill>
+                  <a:srgbClr val="002060"/>
+                </a:solidFill>
+              </a:rPr>
+              <a:t>, ‘</a:t>
+            </a:r>
+            <a:r>
+              <a:rPr lang="ko-KR" altLang="en-US" u="sng" dirty="0" err="1">
+                <a:solidFill>
+                  <a:srgbClr val="002060"/>
+                </a:solidFill>
+              </a:rPr>
+              <a:t>비병</a:t>
+            </a:r>
+            <a:r>
+              <a:rPr lang="en-US" altLang="ko-KR" u="sng" dirty="0">
+                <a:solidFill>
+                  <a:srgbClr val="002060"/>
+                </a:solidFill>
+              </a:rPr>
+              <a:t>’</a:t>
+            </a:r>
+            <a:r>
+              <a:rPr lang="ko-KR" altLang="en-US" u="sng" dirty="0">
+                <a:solidFill>
+                  <a:srgbClr val="002060"/>
+                </a:solidFill>
+              </a:rPr>
+              <a:t>을 제외 한 모든 병들에게 상성이 좋아짐</a:t>
+            </a:r>
+            <a:r>
+              <a:rPr lang="en-US" altLang="ko-KR" dirty="0">
+                <a:solidFill>
+                  <a:srgbClr val="002060"/>
+                </a:solidFill>
+              </a:rPr>
+              <a:t>)</a:t>
+            </a:r>
+          </a:p>
+          <a:p>
+            <a:pPr marL="285750" indent="-285750">
+              <a:buFontTx/>
+              <a:buChar char="-"/>
+            </a:pPr>
+            <a:r>
+              <a:rPr lang="ko-KR" altLang="en-US" dirty="0">
+                <a:solidFill>
+                  <a:srgbClr val="002060"/>
+                </a:solidFill>
+              </a:rPr>
+              <a:t>특수 능력 </a:t>
+            </a:r>
+            <a:r>
+              <a:rPr lang="en-US" altLang="ko-KR" dirty="0">
+                <a:solidFill>
+                  <a:srgbClr val="002060"/>
+                </a:solidFill>
+              </a:rPr>
+              <a:t>: </a:t>
+            </a:r>
+            <a:r>
+              <a:rPr lang="ko-KR" altLang="en-US" dirty="0">
+                <a:solidFill>
+                  <a:srgbClr val="002060"/>
+                </a:solidFill>
+              </a:rPr>
+              <a:t>눈지형에서 전투시 </a:t>
+            </a:r>
+            <a:r>
+              <a:rPr lang="en-US" altLang="ko-KR" u="sng" dirty="0">
+                <a:solidFill>
+                  <a:srgbClr val="002060"/>
+                </a:solidFill>
+              </a:rPr>
+              <a:t>1</a:t>
+            </a:r>
+            <a:r>
+              <a:rPr lang="ko-KR" altLang="en-US" u="sng" dirty="0">
+                <a:solidFill>
+                  <a:srgbClr val="002060"/>
+                </a:solidFill>
+              </a:rPr>
+              <a:t>턴마다 </a:t>
+            </a:r>
+            <a:r>
+              <a:rPr lang="en-US" altLang="ko-KR" u="sng" dirty="0">
+                <a:solidFill>
+                  <a:srgbClr val="002060"/>
+                </a:solidFill>
+              </a:rPr>
+              <a:t>50%</a:t>
+            </a:r>
+            <a:r>
+              <a:rPr lang="ko-KR" altLang="en-US" u="sng" dirty="0">
+                <a:solidFill>
+                  <a:srgbClr val="002060"/>
+                </a:solidFill>
+              </a:rPr>
+              <a:t>확률</a:t>
+            </a:r>
+            <a:r>
+              <a:rPr lang="ko-KR" altLang="en-US" dirty="0">
+                <a:solidFill>
+                  <a:srgbClr val="002060"/>
+                </a:solidFill>
+              </a:rPr>
+              <a:t>로 </a:t>
+            </a:r>
+            <a:r>
+              <a:rPr lang="ko-KR" altLang="en-US" u="sng" dirty="0">
+                <a:solidFill>
+                  <a:srgbClr val="002060"/>
+                </a:solidFill>
+              </a:rPr>
+              <a:t>회피율이 </a:t>
+            </a:r>
+            <a:r>
+              <a:rPr lang="en-US" altLang="ko-KR" u="sng" dirty="0">
+                <a:solidFill>
+                  <a:srgbClr val="002060"/>
+                </a:solidFill>
+              </a:rPr>
+              <a:t>200% </a:t>
+            </a:r>
+            <a:r>
+              <a:rPr lang="ko-KR" altLang="en-US" u="sng" dirty="0">
+                <a:solidFill>
+                  <a:srgbClr val="002060"/>
+                </a:solidFill>
+              </a:rPr>
+              <a:t>상승</a:t>
+            </a:r>
+            <a:r>
+              <a:rPr lang="ko-KR" altLang="en-US" dirty="0">
+                <a:solidFill>
+                  <a:srgbClr val="002060"/>
+                </a:solidFill>
+              </a:rPr>
+              <a:t>하거나</a:t>
+            </a:r>
+            <a:r>
+              <a:rPr lang="en-US" altLang="ko-KR" dirty="0">
+                <a:solidFill>
+                  <a:srgbClr val="002060"/>
+                </a:solidFill>
+              </a:rPr>
+              <a:t>,</a:t>
+            </a:r>
+            <a:r>
+              <a:rPr lang="ko-KR" altLang="en-US" dirty="0">
+                <a:solidFill>
+                  <a:srgbClr val="002060"/>
+                </a:solidFill>
+              </a:rPr>
+              <a:t> </a:t>
+            </a:r>
+            <a:br>
+              <a:rPr lang="en-US" altLang="ko-KR" dirty="0">
+                <a:solidFill>
+                  <a:srgbClr val="002060"/>
+                </a:solidFill>
+              </a:rPr>
+            </a:br>
+            <a:r>
+              <a:rPr lang="en-US" altLang="ko-KR" dirty="0">
+                <a:solidFill>
+                  <a:srgbClr val="002060"/>
+                </a:solidFill>
+              </a:rPr>
+              <a:t>               </a:t>
+            </a:r>
+            <a:r>
+              <a:rPr lang="ko-KR" altLang="en-US" u="sng" dirty="0">
+                <a:solidFill>
+                  <a:srgbClr val="002060"/>
+                </a:solidFill>
+              </a:rPr>
+              <a:t>기본 </a:t>
+            </a:r>
+            <a:r>
+              <a:rPr lang="ko-KR" altLang="en-US" u="sng" dirty="0" err="1">
+                <a:solidFill>
+                  <a:srgbClr val="002060"/>
+                </a:solidFill>
+              </a:rPr>
+              <a:t>회피율</a:t>
+            </a:r>
+            <a:r>
+              <a:rPr lang="ko-KR" altLang="en-US" u="sng" dirty="0">
+                <a:solidFill>
+                  <a:srgbClr val="002060"/>
+                </a:solidFill>
+              </a:rPr>
+              <a:t> </a:t>
+            </a:r>
+            <a:r>
+              <a:rPr lang="ko-KR" altLang="en-US" u="sng" dirty="0" err="1">
+                <a:solidFill>
+                  <a:srgbClr val="002060"/>
+                </a:solidFill>
+              </a:rPr>
+              <a:t>스탯이</a:t>
+            </a:r>
+            <a:r>
+              <a:rPr lang="ko-KR" altLang="en-US" u="sng" dirty="0">
+                <a:solidFill>
+                  <a:srgbClr val="002060"/>
+                </a:solidFill>
+              </a:rPr>
+              <a:t> 유지됨</a:t>
+            </a:r>
+            <a:r>
+              <a:rPr lang="en-US" altLang="ko-KR" dirty="0">
+                <a:solidFill>
+                  <a:srgbClr val="002060"/>
+                </a:solidFill>
+              </a:rPr>
+              <a:t>.</a:t>
+            </a:r>
+          </a:p>
         </p:txBody>
       </p:sp>
       <p:sp>
@@ -3782,8 +4624,8 @@
         </p:nvSpPr>
         <p:spPr>
           <a:xfrm>
-            <a:off x="914399" y="3181172"/>
-            <a:ext cx="9940956" cy="1200329"/>
+            <a:off x="914399" y="4262340"/>
+            <a:ext cx="9940956" cy="2308324"/>
           </a:xfrm>
           <a:prstGeom prst="rect">
             <a:avLst/>
@@ -3852,6 +4694,268 @@
               <a:t>입체기동장치를 이용하여 나무 같은 높은 지형 지물이 많은 곳에서 이동이 수월함</a:t>
             </a:r>
             <a:endParaRPr lang="en-US" altLang="ko-KR" dirty="0"/>
+          </a:p>
+          <a:p>
+            <a:pPr marL="285750" indent="-285750">
+              <a:buFontTx/>
+              <a:buChar char="-"/>
+            </a:pPr>
+            <a:endParaRPr lang="en-US" altLang="ko-KR" dirty="0"/>
+          </a:p>
+          <a:p>
+            <a:pPr marL="285750" indent="-285750">
+              <a:buFontTx/>
+              <a:buChar char="-"/>
+            </a:pPr>
+            <a:r>
+              <a:rPr lang="ko-KR" altLang="en-US" dirty="0">
+                <a:solidFill>
+                  <a:srgbClr val="002060"/>
+                </a:solidFill>
+              </a:rPr>
+              <a:t>사정거리 </a:t>
+            </a:r>
+            <a:r>
+              <a:rPr lang="en-US" altLang="ko-KR" dirty="0">
+                <a:solidFill>
+                  <a:srgbClr val="002060"/>
+                </a:solidFill>
+              </a:rPr>
+              <a:t>: 1</a:t>
+            </a:r>
+            <a:r>
+              <a:rPr lang="ko-KR" altLang="en-US" dirty="0">
+                <a:solidFill>
+                  <a:srgbClr val="002060"/>
+                </a:solidFill>
+              </a:rPr>
+              <a:t>칸 일반 보병과 같은 사거리를 지니고 있음</a:t>
+            </a:r>
+            <a:r>
+              <a:rPr lang="en-US" altLang="ko-KR" dirty="0">
+                <a:solidFill>
+                  <a:srgbClr val="002060"/>
+                </a:solidFill>
+              </a:rPr>
+              <a:t>.</a:t>
+            </a:r>
+          </a:p>
+          <a:p>
+            <a:pPr marL="285750" indent="-285750">
+              <a:buFontTx/>
+              <a:buChar char="-"/>
+            </a:pPr>
+            <a:r>
+              <a:rPr lang="ko-KR" altLang="en-US" dirty="0">
+                <a:solidFill>
+                  <a:srgbClr val="002060"/>
+                </a:solidFill>
+              </a:rPr>
+              <a:t>상성 </a:t>
+            </a:r>
+            <a:r>
+              <a:rPr lang="en-US" altLang="ko-KR" dirty="0">
+                <a:solidFill>
+                  <a:srgbClr val="002060"/>
+                </a:solidFill>
+              </a:rPr>
+              <a:t>: ‘</a:t>
+            </a:r>
+            <a:r>
+              <a:rPr lang="ko-KR" altLang="en-US" dirty="0">
+                <a:solidFill>
+                  <a:srgbClr val="002060"/>
+                </a:solidFill>
+              </a:rPr>
+              <a:t>수병</a:t>
+            </a:r>
+            <a:r>
+              <a:rPr lang="en-US" altLang="ko-KR" dirty="0">
+                <a:solidFill>
+                  <a:srgbClr val="002060"/>
+                </a:solidFill>
+              </a:rPr>
+              <a:t>’(</a:t>
+            </a:r>
+            <a:r>
+              <a:rPr lang="ko-KR" altLang="en-US" dirty="0">
+                <a:solidFill>
+                  <a:srgbClr val="002060"/>
+                </a:solidFill>
+              </a:rPr>
+              <a:t>물지형에서 전투시</a:t>
+            </a:r>
+            <a:r>
+              <a:rPr lang="en-US" altLang="ko-KR" dirty="0">
+                <a:solidFill>
+                  <a:srgbClr val="002060"/>
+                </a:solidFill>
+              </a:rPr>
+              <a:t>)</a:t>
+            </a:r>
+            <a:r>
+              <a:rPr lang="ko-KR" altLang="en-US" dirty="0">
+                <a:solidFill>
+                  <a:srgbClr val="002060"/>
+                </a:solidFill>
+              </a:rPr>
+              <a:t>과 </a:t>
+            </a:r>
+            <a:r>
+              <a:rPr lang="en-US" altLang="ko-KR" dirty="0">
+                <a:solidFill>
+                  <a:srgbClr val="002060"/>
+                </a:solidFill>
+              </a:rPr>
+              <a:t>‘</a:t>
+            </a:r>
+            <a:r>
+              <a:rPr lang="ko-KR" altLang="en-US" dirty="0" err="1">
+                <a:solidFill>
+                  <a:srgbClr val="002060"/>
+                </a:solidFill>
+              </a:rPr>
+              <a:t>비병</a:t>
+            </a:r>
+            <a:r>
+              <a:rPr lang="en-US" altLang="ko-KR" dirty="0">
+                <a:solidFill>
+                  <a:srgbClr val="002060"/>
+                </a:solidFill>
+              </a:rPr>
+              <a:t>’</a:t>
+            </a:r>
+            <a:r>
+              <a:rPr lang="ko-KR" altLang="en-US" dirty="0">
+                <a:solidFill>
+                  <a:srgbClr val="002060"/>
+                </a:solidFill>
+              </a:rPr>
+              <a:t>에 약하지만 </a:t>
+            </a:r>
+            <a:r>
+              <a:rPr lang="ko-KR" altLang="en-US" u="sng" dirty="0">
+                <a:solidFill>
+                  <a:srgbClr val="002060"/>
+                </a:solidFill>
+              </a:rPr>
+              <a:t>늪지대 지형에서 동등해질 수 있음</a:t>
+            </a:r>
+            <a:r>
+              <a:rPr lang="en-US" altLang="ko-KR" dirty="0">
+                <a:solidFill>
+                  <a:srgbClr val="002060"/>
+                </a:solidFill>
+              </a:rPr>
+              <a:t>.</a:t>
+            </a:r>
+          </a:p>
+          <a:p>
+            <a:pPr marL="285750" indent="-285750">
+              <a:buFontTx/>
+              <a:buChar char="-"/>
+            </a:pPr>
+            <a:r>
+              <a:rPr lang="ko-KR" altLang="en-US" dirty="0">
+                <a:solidFill>
+                  <a:srgbClr val="002060"/>
+                </a:solidFill>
+              </a:rPr>
+              <a:t>특수 능력 </a:t>
+            </a:r>
+            <a:r>
+              <a:rPr lang="en-US" altLang="ko-KR" dirty="0">
+                <a:solidFill>
+                  <a:srgbClr val="002060"/>
+                </a:solidFill>
+              </a:rPr>
+              <a:t>: </a:t>
+            </a:r>
+            <a:r>
+              <a:rPr lang="ko-KR" altLang="en-US" u="sng" dirty="0">
+                <a:solidFill>
+                  <a:srgbClr val="002060"/>
+                </a:solidFill>
+              </a:rPr>
+              <a:t>최대 </a:t>
+            </a:r>
+            <a:r>
+              <a:rPr lang="en-US" altLang="ko-KR" u="sng" dirty="0">
+                <a:solidFill>
+                  <a:srgbClr val="002060"/>
+                </a:solidFill>
+              </a:rPr>
+              <a:t>3</a:t>
+            </a:r>
+            <a:r>
+              <a:rPr lang="ko-KR" altLang="en-US" u="sng" dirty="0">
+                <a:solidFill>
+                  <a:srgbClr val="002060"/>
+                </a:solidFill>
+              </a:rPr>
+              <a:t>칸을 이동 후</a:t>
+            </a:r>
+            <a:r>
+              <a:rPr lang="ko-KR" altLang="en-US" dirty="0">
+                <a:solidFill>
+                  <a:srgbClr val="002060"/>
+                </a:solidFill>
+              </a:rPr>
+              <a:t> 주변 </a:t>
+            </a:r>
+            <a:r>
+              <a:rPr lang="ko-KR" altLang="en-US" u="sng" dirty="0" err="1">
+                <a:solidFill>
+                  <a:srgbClr val="002060"/>
+                </a:solidFill>
+              </a:rPr>
+              <a:t>상하좌우대각선</a:t>
+            </a:r>
+            <a:r>
+              <a:rPr lang="ko-KR" altLang="en-US" u="sng" dirty="0">
+                <a:solidFill>
+                  <a:srgbClr val="002060"/>
+                </a:solidFill>
+              </a:rPr>
+              <a:t> </a:t>
+            </a:r>
+            <a:r>
+              <a:rPr lang="en-US" altLang="ko-KR" u="sng" dirty="0">
+                <a:solidFill>
+                  <a:srgbClr val="002060"/>
+                </a:solidFill>
+              </a:rPr>
+              <a:t>1</a:t>
+            </a:r>
+            <a:r>
+              <a:rPr lang="ko-KR" altLang="en-US" u="sng" dirty="0">
+                <a:solidFill>
+                  <a:srgbClr val="002060"/>
+                </a:solidFill>
+              </a:rPr>
+              <a:t>칸 범위 공격을 시전함</a:t>
+            </a:r>
+            <a:r>
+              <a:rPr lang="en-US" altLang="ko-KR" dirty="0">
+                <a:solidFill>
+                  <a:srgbClr val="002060"/>
+                </a:solidFill>
+              </a:rPr>
+              <a:t>.</a:t>
+            </a:r>
+            <a:r>
+              <a:rPr lang="ko-KR" altLang="en-US" dirty="0">
+                <a:solidFill>
+                  <a:srgbClr val="002060"/>
+                </a:solidFill>
+              </a:rPr>
+              <a:t> </a:t>
+            </a:r>
+            <a:endParaRPr lang="en-US" altLang="ko-KR" dirty="0">
+              <a:solidFill>
+                <a:srgbClr val="002060"/>
+              </a:solidFill>
+            </a:endParaRPr>
           </a:p>
         </p:txBody>
       </p:sp>
@@ -3900,13 +5004,13 @@
           <p:nvPr>
             <p:extLst>
               <p:ext uri="{D42A27DB-BD31-4B8C-83A1-F6EECF244321}">
-                <p14:modId xmlns:p14="http://schemas.microsoft.com/office/powerpoint/2010/main" val="374042508"/>
+                <p14:modId xmlns:p14="http://schemas.microsoft.com/office/powerpoint/2010/main" val="2600263215"/>
               </p:ext>
             </p:extLst>
           </p:nvPr>
         </p:nvGraphicFramePr>
         <p:xfrm>
-          <a:off x="2936147" y="1635852"/>
+          <a:off x="2801923" y="738230"/>
           <a:ext cx="5805184" cy="2936147"/>
         </p:xfrm>
         <a:graphic>
@@ -6301,6 +7405,238 @@
           </a:graphicData>
         </a:graphic>
       </p:graphicFrame>
+      <p:sp>
+        <p:nvSpPr>
+          <p:cNvPr id="3" name="TextBox 2">
+            <a:extLst>
+              <a:ext uri="{FF2B5EF4-FFF2-40B4-BE49-F238E27FC236}">
+                <a16:creationId xmlns:a16="http://schemas.microsoft.com/office/drawing/2014/main" id="{25960A1D-FE29-4AE9-93F6-D1F6D5CFC6C9}"/>
+              </a:ext>
+            </a:extLst>
+          </p:cNvPr>
+          <p:cNvSpPr txBox="1"/>
+          <p:nvPr/>
+        </p:nvSpPr>
+        <p:spPr>
+          <a:xfrm>
+            <a:off x="3657600" y="4070060"/>
+            <a:ext cx="2248249" cy="923330"/>
+          </a:xfrm>
+          <a:prstGeom prst="rect">
+            <a:avLst/>
+          </a:prstGeom>
+          <a:noFill/>
+        </p:spPr>
+        <p:txBody>
+          <a:bodyPr wrap="square" rtlCol="0">
+            <a:spAutoFit/>
+          </a:bodyPr>
+          <a:lstStyle/>
+          <a:p>
+            <a:r>
+              <a:rPr lang="ko-KR" altLang="en-US" dirty="0"/>
+              <a:t>기병 </a:t>
+            </a:r>
+            <a:r>
+              <a:rPr lang="en-US" altLang="ko-KR" dirty="0"/>
+              <a:t>:</a:t>
+            </a:r>
+          </a:p>
+          <a:p>
+            <a:r>
+              <a:rPr lang="ko-KR" altLang="en-US" dirty="0"/>
+              <a:t>사정거리 </a:t>
+            </a:r>
+            <a:r>
+              <a:rPr lang="en-US" altLang="ko-KR" dirty="0"/>
+              <a:t>: 2</a:t>
+            </a:r>
+            <a:r>
+              <a:rPr lang="ko-KR" altLang="en-US" dirty="0"/>
+              <a:t>칸</a:t>
+            </a:r>
+            <a:endParaRPr lang="en-US" altLang="ko-KR" dirty="0"/>
+          </a:p>
+          <a:p>
+            <a:endParaRPr lang="ko-KR" altLang="en-US" dirty="0"/>
+          </a:p>
+        </p:txBody>
+      </p:sp>
+      <p:sp>
+        <p:nvSpPr>
+          <p:cNvPr id="6" name="TextBox 5">
+            <a:extLst>
+              <a:ext uri="{FF2B5EF4-FFF2-40B4-BE49-F238E27FC236}">
+                <a16:creationId xmlns:a16="http://schemas.microsoft.com/office/drawing/2014/main" id="{EC129FC6-318E-4E16-9C48-9E0197F9FCFC}"/>
+              </a:ext>
+            </a:extLst>
+          </p:cNvPr>
+          <p:cNvSpPr txBox="1"/>
+          <p:nvPr/>
+        </p:nvSpPr>
+        <p:spPr>
+          <a:xfrm>
+            <a:off x="915798" y="4070060"/>
+            <a:ext cx="2248249" cy="923330"/>
+          </a:xfrm>
+          <a:prstGeom prst="rect">
+            <a:avLst/>
+          </a:prstGeom>
+          <a:noFill/>
+        </p:spPr>
+        <p:txBody>
+          <a:bodyPr wrap="square" rtlCol="0">
+            <a:spAutoFit/>
+          </a:bodyPr>
+          <a:lstStyle/>
+          <a:p>
+            <a:r>
+              <a:rPr lang="ko-KR" altLang="en-US" dirty="0"/>
+              <a:t>보병 </a:t>
+            </a:r>
+            <a:r>
+              <a:rPr lang="en-US" altLang="ko-KR" dirty="0"/>
+              <a:t>:</a:t>
+            </a:r>
+          </a:p>
+          <a:p>
+            <a:r>
+              <a:rPr lang="ko-KR" altLang="en-US" dirty="0"/>
+              <a:t>사정거리 </a:t>
+            </a:r>
+            <a:r>
+              <a:rPr lang="en-US" altLang="ko-KR" dirty="0"/>
+              <a:t>: 1</a:t>
+            </a:r>
+            <a:r>
+              <a:rPr lang="ko-KR" altLang="en-US" dirty="0"/>
+              <a:t>칸</a:t>
+            </a:r>
+            <a:endParaRPr lang="en-US" altLang="ko-KR" dirty="0"/>
+          </a:p>
+          <a:p>
+            <a:endParaRPr lang="ko-KR" altLang="en-US" dirty="0"/>
+          </a:p>
+        </p:txBody>
+      </p:sp>
+      <p:sp>
+        <p:nvSpPr>
+          <p:cNvPr id="7" name="TextBox 6">
+            <a:extLst>
+              <a:ext uri="{FF2B5EF4-FFF2-40B4-BE49-F238E27FC236}">
+                <a16:creationId xmlns:a16="http://schemas.microsoft.com/office/drawing/2014/main" id="{B1C61CD8-28A8-4F13-8F7F-11FC1C6FD514}"/>
+              </a:ext>
+            </a:extLst>
+          </p:cNvPr>
+          <p:cNvSpPr txBox="1"/>
+          <p:nvPr/>
+        </p:nvSpPr>
+        <p:spPr>
+          <a:xfrm>
+            <a:off x="6096000" y="4070060"/>
+            <a:ext cx="2248249" cy="923330"/>
+          </a:xfrm>
+          <a:prstGeom prst="rect">
+            <a:avLst/>
+          </a:prstGeom>
+          <a:noFill/>
+        </p:spPr>
+        <p:txBody>
+          <a:bodyPr wrap="square" rtlCol="0">
+            <a:spAutoFit/>
+          </a:bodyPr>
+          <a:lstStyle/>
+          <a:p>
+            <a:r>
+              <a:rPr lang="ko-KR" altLang="en-US" dirty="0" err="1"/>
+              <a:t>비병</a:t>
+            </a:r>
+            <a:r>
+              <a:rPr lang="ko-KR" altLang="en-US" dirty="0"/>
+              <a:t> </a:t>
+            </a:r>
+            <a:r>
+              <a:rPr lang="en-US" altLang="ko-KR" dirty="0"/>
+              <a:t>:</a:t>
+            </a:r>
+          </a:p>
+          <a:p>
+            <a:r>
+              <a:rPr lang="ko-KR" altLang="en-US" dirty="0"/>
+              <a:t>사정거리 </a:t>
+            </a:r>
+            <a:r>
+              <a:rPr lang="en-US" altLang="ko-KR" dirty="0"/>
+              <a:t>: 3</a:t>
+            </a:r>
+            <a:r>
+              <a:rPr lang="ko-KR" altLang="en-US" dirty="0"/>
+              <a:t>칸</a:t>
+            </a:r>
+            <a:endParaRPr lang="en-US" altLang="ko-KR" dirty="0"/>
+          </a:p>
+          <a:p>
+            <a:endParaRPr lang="ko-KR" altLang="en-US" dirty="0"/>
+          </a:p>
+        </p:txBody>
+      </p:sp>
+      <p:sp>
+        <p:nvSpPr>
+          <p:cNvPr id="8" name="TextBox 7">
+            <a:extLst>
+              <a:ext uri="{FF2B5EF4-FFF2-40B4-BE49-F238E27FC236}">
+                <a16:creationId xmlns:a16="http://schemas.microsoft.com/office/drawing/2014/main" id="{10723430-5326-4769-862D-9DF0E7DD1259}"/>
+              </a:ext>
+            </a:extLst>
+          </p:cNvPr>
+          <p:cNvSpPr txBox="1"/>
+          <p:nvPr/>
+        </p:nvSpPr>
+        <p:spPr>
+          <a:xfrm>
+            <a:off x="8344249" y="4070060"/>
+            <a:ext cx="2248249" cy="923330"/>
+          </a:xfrm>
+          <a:prstGeom prst="rect">
+            <a:avLst/>
+          </a:prstGeom>
+          <a:noFill/>
+        </p:spPr>
+        <p:txBody>
+          <a:bodyPr wrap="square" rtlCol="0">
+            <a:spAutoFit/>
+          </a:bodyPr>
+          <a:lstStyle/>
+          <a:p>
+            <a:r>
+              <a:rPr lang="ko-KR" altLang="en-US" dirty="0"/>
+              <a:t>수병 </a:t>
+            </a:r>
+            <a:r>
+              <a:rPr lang="en-US" altLang="ko-KR" dirty="0"/>
+              <a:t>:</a:t>
+            </a:r>
+          </a:p>
+          <a:p>
+            <a:r>
+              <a:rPr lang="ko-KR" altLang="en-US" dirty="0"/>
+              <a:t>사정거리 </a:t>
+            </a:r>
+            <a:r>
+              <a:rPr lang="en-US" altLang="ko-KR" dirty="0"/>
+              <a:t>: 1</a:t>
+            </a:r>
+            <a:r>
+              <a:rPr lang="ko-KR" altLang="en-US" dirty="0"/>
+              <a:t>칸</a:t>
+            </a:r>
+            <a:endParaRPr lang="en-US" altLang="ko-KR" dirty="0"/>
+          </a:p>
+          <a:p>
+            <a:endParaRPr lang="ko-KR" altLang="en-US" dirty="0"/>
+          </a:p>
+        </p:txBody>
+      </p:sp>
     </p:spTree>
     <p:extLst>
       <p:ext uri="{BB962C8B-B14F-4D97-AF65-F5344CB8AC3E}">
